--- a/pptx/midterm/REMUS_Background_Slide_4.pptx
+++ b/pptx/midterm/REMUS_Background_Slide_4.pptx
@@ -5,10 +5,10 @@
     <p:sldMasterId xmlns:r="http://schemas.openxmlformats.org/officeDocument/2006/relationships" id="2147483648" r:id="rId1"/>
   </p:sldMasterIdLst>
   <p:notesMasterIdLst>
-    <p:notesMasterId r:id="Rcb933fa234e1499d"/>
+    <p:notesMasterId r:id="R1f61dc5011b84f30"/>
   </p:notesMasterIdLst>
   <p:sldIdLst>
-    <p:sldId id="256" r:id="R30b60fad03324589"/>
+    <p:sldId id="256" r:id="Rf0d0dbb4431444da"/>
   </p:sldIdLst>
   <p:sldSz cx="12192000" cy="6858000" type="screen16x9"/>
   <p:notesSz cx="6858000" cy="9144000"/>
@@ -775,8 +775,8 @@
 </file>
 
 <file path=ppt/slides/slide1.xml><?xml version="1.0" encoding="utf-8"?>
-<p:sld xmlns:a="http://schemas.openxmlformats.org/drawingml/2006/main" xmlns:p="http://schemas.openxmlformats.org/presentationml/2006/main">
-  <p:cSld>
+<p:sld xmlns:a="http://schemas.openxmlformats.org/drawingml/2006/main" xmlns:r="http://schemas.openxmlformats.org/officeDocument/2006/relationships" xmlns:p="http://schemas.openxmlformats.org/presentationml/2006/main">
+  <p:cSld xmlns:a="http://schemas.openxmlformats.org/drawingml/2006/main" xmlns:p="http://schemas.openxmlformats.org/presentationml/2006/main" xmlns:r="http://schemas.openxmlformats.org/officeDocument/2006/relationships">
     <p:bg>
       <p:bgPr>
         <a:solidFill xmlns:a="http://schemas.openxmlformats.org/drawingml/2006/main">
@@ -814,16 +814,27 @@
             <a:noAutofit/>
           </a:bodyPr>
           <a:lstStyle xmlns:a="http://schemas.openxmlformats.org/drawingml/2006/main"/>
-          <a:p xmlns:a="http://schemas.openxmlformats.org/drawingml/2006/main">
-            <a:r>
-              <a:rPr lang="en-US" sz="3200" b="1">
+          <a:p>
+            <a:pPr algn="l">
+              <a:lnSpc>
+                <a:spcPct val="90000"/>
+              </a:lnSpc>
+              <a:defRPr sz="3200" b="1">
                 <a:solidFill>
                   <a:srgbClr val="183B56"/>
                 </a:solidFill>
                 <a:latin typeface="Arial"/>
                 <a:ea typeface="Arial"/>
+              </a:defRPr>
+            </a:pPr>
+            <a:r>
+              <a:rPr sz="3200" b="1">
+                <a:solidFill>
+                  <a:srgbClr val="183B56"/>
+                </a:solidFill>
+                <a:latin typeface="Arial"/>
               </a:rPr>
-              <a:t>4. Research Gap and Goal</a:t>
+              <a:t>Research Gap and Goal</a:t>
             </a:r>
           </a:p>
         </p:txBody>
@@ -981,16 +992,24 @@
           </a:bodyPr>
           <a:lstStyle/>
           <a:p>
-            <a:pPr algn="ctr"/>
+            <a:pPr algn="ctr">
+              <a:defRPr sz="1400" b="0">
+                <a:solidFill>
+                  <a:srgbClr val="607184"/>
+                </a:solidFill>
+                <a:latin typeface="Arial"/>
+                <a:ea typeface="Arial"/>
+              </a:defRPr>
+            </a:pPr>
             <a:r>
-              <a:rPr lang="en-US" sz="1400" b="0">
+              <a:rPr sz="1400">
                 <a:solidFill>
                   <a:srgbClr val="607184"/>
                 </a:solidFill>
                 <a:latin typeface="Arial"/>
                 <a:ea typeface="Arial"/>
               </a:rPr>
-              <a:t>Primary focus: capacity &amp; speed</a:t>
+              <a:t>Related work: FireAxe, DUOHUAFEN</a:t>
             </a:r>
           </a:p>
         </p:txBody>
@@ -1040,7 +1059,7 @@
         </p:nvSpPr>
         <p:spPr>
           <a:xfrm>
-            <a:off x="548640" y="3364992"/>
+            <a:off x="548640" y="3449400"/>
             <a:ext cx="265176" cy="265176"/>
           </a:xfrm>
           <a:prstGeom prst="ellipse">
@@ -1077,7 +1096,7 @@
         </p:nvSpPr>
         <p:spPr>
           <a:xfrm rot="2700000">
-            <a:off x="609905" y="3503066"/>
+            <a:off x="609905" y="3587474"/>
             <a:ext cx="84125" cy="33833"/>
           </a:xfrm>
           <a:prstGeom prst="rect">
@@ -1114,7 +1133,7 @@
         </p:nvSpPr>
         <p:spPr>
           <a:xfrm rot="18900000">
-            <a:off x="647395" y="3481121"/>
+            <a:off x="647395" y="3565529"/>
             <a:ext cx="125273" cy="33833"/>
           </a:xfrm>
           <a:prstGeom prst="rect">
@@ -1151,7 +1170,7 @@
         </p:nvSpPr>
         <p:spPr>
           <a:xfrm>
-            <a:off x="960120" y="3358591"/>
+            <a:off x="960120" y="3442999"/>
             <a:ext cx="2916936" cy="310896"/>
           </a:xfrm>
           <a:prstGeom prst="rect">
@@ -1189,7 +1208,7 @@
         </p:nvSpPr>
         <p:spPr>
           <a:xfrm>
-            <a:off x="548640" y="3730752"/>
+            <a:off x="548640" y="3815160"/>
             <a:ext cx="265176" cy="265176"/>
           </a:xfrm>
           <a:prstGeom prst="ellipse">
@@ -1226,7 +1245,7 @@
         </p:nvSpPr>
         <p:spPr>
           <a:xfrm rot="2700000">
-            <a:off x="609905" y="3868826"/>
+            <a:off x="609905" y="3953234"/>
             <a:ext cx="84125" cy="33833"/>
           </a:xfrm>
           <a:prstGeom prst="rect">
@@ -1263,7 +1282,7 @@
         </p:nvSpPr>
         <p:spPr>
           <a:xfrm rot="18900000">
-            <a:off x="647395" y="3846881"/>
+            <a:off x="647395" y="3931289"/>
             <a:ext cx="125273" cy="33833"/>
           </a:xfrm>
           <a:prstGeom prst="rect">
@@ -1300,7 +1319,7 @@
         </p:nvSpPr>
         <p:spPr>
           <a:xfrm>
-            <a:off x="960120" y="3724351"/>
+            <a:off x="960120" y="3808759"/>
             <a:ext cx="2916936" cy="310896"/>
           </a:xfrm>
           <a:prstGeom prst="rect">
@@ -1338,7 +1357,7 @@
         </p:nvSpPr>
         <p:spPr>
           <a:xfrm>
-            <a:off x="548640" y="4096512"/>
+            <a:off x="548640" y="4180920"/>
             <a:ext cx="265176" cy="265176"/>
           </a:xfrm>
           <a:prstGeom prst="ellipse">
@@ -1375,7 +1394,7 @@
         </p:nvSpPr>
         <p:spPr>
           <a:xfrm>
-            <a:off x="548640" y="4094683"/>
+            <a:off x="548640" y="4179091"/>
             <a:ext cx="265176" cy="265176"/>
           </a:xfrm>
           <a:prstGeom prst="rect">
@@ -1414,7 +1433,7 @@
         </p:nvSpPr>
         <p:spPr>
           <a:xfrm>
-            <a:off x="960120" y="4090111"/>
+            <a:off x="960120" y="4174519"/>
             <a:ext cx="2916936" cy="310896"/>
           </a:xfrm>
           <a:prstGeom prst="rect">
@@ -1452,7 +1471,7 @@
         </p:nvSpPr>
         <p:spPr>
           <a:xfrm>
-            <a:off x="548640" y="4462272"/>
+            <a:off x="548640" y="4546680"/>
             <a:ext cx="265176" cy="265176"/>
           </a:xfrm>
           <a:prstGeom prst="ellipse">
@@ -1489,7 +1508,7 @@
         </p:nvSpPr>
         <p:spPr>
           <a:xfrm>
-            <a:off x="548640" y="4460443"/>
+            <a:off x="548640" y="4544851"/>
             <a:ext cx="265176" cy="265176"/>
           </a:xfrm>
           <a:prstGeom prst="rect">
@@ -1528,7 +1547,7 @@
         </p:nvSpPr>
         <p:spPr>
           <a:xfrm>
-            <a:off x="960120" y="4455871"/>
+            <a:off x="960120" y="4540279"/>
             <a:ext cx="2916936" cy="310896"/>
           </a:xfrm>
           <a:prstGeom prst="rect">
@@ -1566,7 +1585,7 @@
         </p:nvSpPr>
         <p:spPr>
           <a:xfrm>
-            <a:off x="548640" y="4828032"/>
+            <a:off x="548640" y="4912440"/>
             <a:ext cx="265176" cy="265176"/>
           </a:xfrm>
           <a:prstGeom prst="ellipse">
@@ -1603,7 +1622,7 @@
         </p:nvSpPr>
         <p:spPr>
           <a:xfrm>
-            <a:off x="548640" y="4826203"/>
+            <a:off x="548640" y="4910611"/>
             <a:ext cx="265176" cy="265176"/>
           </a:xfrm>
           <a:prstGeom prst="rect">
@@ -1642,7 +1661,7 @@
         </p:nvSpPr>
         <p:spPr>
           <a:xfrm>
-            <a:off x="960120" y="4821631"/>
+            <a:off x="960120" y="4906039"/>
             <a:ext cx="2916936" cy="310896"/>
           </a:xfrm>
           <a:prstGeom prst="rect">
@@ -1680,7 +1699,7 @@
         </p:nvSpPr>
         <p:spPr>
           <a:xfrm>
-            <a:off x="548640" y="5193792"/>
+            <a:off x="548640" y="5278200"/>
             <a:ext cx="265176" cy="265176"/>
           </a:xfrm>
           <a:prstGeom prst="ellipse">
@@ -1717,7 +1736,7 @@
         </p:nvSpPr>
         <p:spPr>
           <a:xfrm>
-            <a:off x="548640" y="5191963"/>
+            <a:off x="548640" y="5276371"/>
             <a:ext cx="265176" cy="265176"/>
           </a:xfrm>
           <a:prstGeom prst="rect">
@@ -1756,7 +1775,7 @@
         </p:nvSpPr>
         <p:spPr>
           <a:xfrm>
-            <a:off x="960120" y="5187391"/>
+            <a:off x="960120" y="5271799"/>
             <a:ext cx="2916936" cy="310896"/>
           </a:xfrm>
           <a:prstGeom prst="rect">
@@ -1782,45 +1801,6 @@
                 <a:ea typeface="Arial"/>
               </a:rPr>
               <a:t>Waveform reconstruction</a:t>
-            </a:r>
-          </a:p>
-        </p:txBody>
-      </p:sp>
-      <p:sp>
-        <p:nvSpPr>
-          <p:cNvPr id="100025" name="S04.Prototype.Scope"/>
-          <p:cNvSpPr txBox="1"/>
-          <p:nvPr/>
-        </p:nvSpPr>
-        <p:spPr>
-          <a:xfrm>
-            <a:off x="484632" y="5577840"/>
-            <a:ext cx="3383280" cy="228600"/>
-          </a:xfrm>
-          <a:prstGeom prst="rect">
-            <a:avLst/>
-          </a:prstGeom>
-          <a:noFill/>
-          <a:ln>
-            <a:noFill/>
-          </a:ln>
-        </p:spPr>
-        <p:txBody>
-          <a:bodyPr lIns="0" tIns="0" rIns="0" bIns="0">
-            <a:noAutofit/>
-          </a:bodyPr>
-          <a:lstStyle/>
-          <a:p>
-            <a:pPr algn="ctr"/>
-            <a:r>
-              <a:rPr lang="en-US" sz="1200">
-                <a:solidFill>
-                  <a:srgbClr val="607184"/>
-                </a:solidFill>
-                <a:latin typeface="Arial"/>
-                <a:ea typeface="Arial"/>
-              </a:rPr>
-              <a:t>Debug support varies by system</a:t>
             </a:r>
           </a:p>
         </p:txBody>
@@ -1941,16 +1921,24 @@
           </a:bodyPr>
           <a:lstStyle/>
           <a:p>
-            <a:pPr algn="ctr"/>
+            <a:pPr algn="ctr">
+              <a:defRPr sz="1400" b="0">
+                <a:solidFill>
+                  <a:srgbClr val="607184"/>
+                </a:solidFill>
+                <a:latin typeface="Arial"/>
+                <a:ea typeface="Arial"/>
+              </a:defRPr>
+            </a:pPr>
             <a:r>
-              <a:rPr lang="en-US" sz="1400" b="0">
+              <a:rPr sz="1400">
                 <a:solidFill>
                   <a:srgbClr val="607184"/>
                 </a:solidFill>
                 <a:latin typeface="Arial"/>
                 <a:ea typeface="Arial"/>
               </a:rPr>
-              <a:t>Scan-based state &amp; replay</a:t>
+              <a:t>Related work: REMU</a:t>
             </a:r>
           </a:p>
         </p:txBody>
@@ -2000,7 +1988,7 @@
         </p:nvSpPr>
         <p:spPr>
           <a:xfrm>
-            <a:off x="4471416" y="3364992"/>
+            <a:off x="4471416" y="3449400"/>
             <a:ext cx="265176" cy="265176"/>
           </a:xfrm>
           <a:prstGeom prst="ellipse">
@@ -2037,7 +2025,7 @@
         </p:nvSpPr>
         <p:spPr>
           <a:xfrm>
-            <a:off x="4530852" y="3478378"/>
+            <a:off x="4530852" y="3562786"/>
             <a:ext cx="146304" cy="38405"/>
           </a:xfrm>
           <a:prstGeom prst="rect">
@@ -2074,7 +2062,7 @@
         </p:nvSpPr>
         <p:spPr>
           <a:xfrm>
-            <a:off x="4882896" y="3358591"/>
+            <a:off x="4882896" y="3442999"/>
             <a:ext cx="2916936" cy="310896"/>
           </a:xfrm>
           <a:prstGeom prst="rect">
@@ -2112,7 +2100,7 @@
         </p:nvSpPr>
         <p:spPr>
           <a:xfrm>
-            <a:off x="4471416" y="3730752"/>
+            <a:off x="4471416" y="3815160"/>
             <a:ext cx="265176" cy="265176"/>
           </a:xfrm>
           <a:prstGeom prst="ellipse">
@@ -2149,7 +2137,7 @@
         </p:nvSpPr>
         <p:spPr>
           <a:xfrm rot="2700000">
-            <a:off x="4532681" y="3868826"/>
+            <a:off x="4532681" y="3953234"/>
             <a:ext cx="84125" cy="33833"/>
           </a:xfrm>
           <a:prstGeom prst="rect">
@@ -2186,7 +2174,7 @@
         </p:nvSpPr>
         <p:spPr>
           <a:xfrm rot="18900000">
-            <a:off x="4570171" y="3846881"/>
+            <a:off x="4570171" y="3931289"/>
             <a:ext cx="125273" cy="33833"/>
           </a:xfrm>
           <a:prstGeom prst="rect">
@@ -2223,7 +2211,7 @@
         </p:nvSpPr>
         <p:spPr>
           <a:xfrm>
-            <a:off x="4882896" y="3724351"/>
+            <a:off x="4882896" y="3808759"/>
             <a:ext cx="2916936" cy="310896"/>
           </a:xfrm>
           <a:prstGeom prst="rect">
@@ -2261,7 +2249,7 @@
         </p:nvSpPr>
         <p:spPr>
           <a:xfrm>
-            <a:off x="4471416" y="4096512"/>
+            <a:off x="4471416" y="4180920"/>
             <a:ext cx="265176" cy="265176"/>
           </a:xfrm>
           <a:prstGeom prst="ellipse">
@@ -2298,7 +2286,7 @@
         </p:nvSpPr>
         <p:spPr>
           <a:xfrm rot="2700000">
-            <a:off x="4532681" y="4234586"/>
+            <a:off x="4532681" y="4318994"/>
             <a:ext cx="84125" cy="33833"/>
           </a:xfrm>
           <a:prstGeom prst="rect">
@@ -2335,7 +2323,7 @@
         </p:nvSpPr>
         <p:spPr>
           <a:xfrm rot="18900000">
-            <a:off x="4570171" y="4212641"/>
+            <a:off x="4570171" y="4297049"/>
             <a:ext cx="125273" cy="33833"/>
           </a:xfrm>
           <a:prstGeom prst="rect">
@@ -2372,7 +2360,7 @@
         </p:nvSpPr>
         <p:spPr>
           <a:xfrm>
-            <a:off x="4882896" y="4090111"/>
+            <a:off x="4882896" y="4174519"/>
             <a:ext cx="2916936" cy="310896"/>
           </a:xfrm>
           <a:prstGeom prst="rect">
@@ -2410,7 +2398,7 @@
         </p:nvSpPr>
         <p:spPr>
           <a:xfrm>
-            <a:off x="4471416" y="4462272"/>
+            <a:off x="4471416" y="4546680"/>
             <a:ext cx="265176" cy="265176"/>
           </a:xfrm>
           <a:prstGeom prst="ellipse">
@@ -2447,7 +2435,7 @@
         </p:nvSpPr>
         <p:spPr>
           <a:xfrm rot="2700000">
-            <a:off x="4532681" y="4600346"/>
+            <a:off x="4532681" y="4684754"/>
             <a:ext cx="84125" cy="33833"/>
           </a:xfrm>
           <a:prstGeom prst="rect">
@@ -2484,7 +2472,7 @@
         </p:nvSpPr>
         <p:spPr>
           <a:xfrm rot="18900000">
-            <a:off x="4570171" y="4578401"/>
+            <a:off x="4570171" y="4662809"/>
             <a:ext cx="125273" cy="33833"/>
           </a:xfrm>
           <a:prstGeom prst="rect">
@@ -2521,7 +2509,7 @@
         </p:nvSpPr>
         <p:spPr>
           <a:xfrm>
-            <a:off x="4882896" y="4455871"/>
+            <a:off x="4882896" y="4540279"/>
             <a:ext cx="2916936" cy="310896"/>
           </a:xfrm>
           <a:prstGeom prst="rect">
@@ -2559,7 +2547,7 @@
         </p:nvSpPr>
         <p:spPr>
           <a:xfrm>
-            <a:off x="4471416" y="4828032"/>
+            <a:off x="4471416" y="4912440"/>
             <a:ext cx="265176" cy="265176"/>
           </a:xfrm>
           <a:prstGeom prst="ellipse">
@@ -2596,7 +2584,7 @@
         </p:nvSpPr>
         <p:spPr>
           <a:xfrm rot="2700000">
-            <a:off x="4532681" y="4966106"/>
+            <a:off x="4532681" y="5050514"/>
             <a:ext cx="84125" cy="33833"/>
           </a:xfrm>
           <a:prstGeom prst="rect">
@@ -2633,7 +2621,7 @@
         </p:nvSpPr>
         <p:spPr>
           <a:xfrm rot="18900000">
-            <a:off x="4570171" y="4944161"/>
+            <a:off x="4570171" y="5028569"/>
             <a:ext cx="125273" cy="33833"/>
           </a:xfrm>
           <a:prstGeom prst="rect">
@@ -2670,7 +2658,7 @@
         </p:nvSpPr>
         <p:spPr>
           <a:xfrm>
-            <a:off x="4882896" y="4821631"/>
+            <a:off x="4882896" y="4906039"/>
             <a:ext cx="2916936" cy="310896"/>
           </a:xfrm>
           <a:prstGeom prst="rect">
@@ -2708,7 +2696,7 @@
         </p:nvSpPr>
         <p:spPr>
           <a:xfrm>
-            <a:off x="4471416" y="5193792"/>
+            <a:off x="4471416" y="5278200"/>
             <a:ext cx="265176" cy="265176"/>
           </a:xfrm>
           <a:prstGeom prst="ellipse">
@@ -2745,7 +2733,7 @@
         </p:nvSpPr>
         <p:spPr>
           <a:xfrm rot="2700000">
-            <a:off x="4532681" y="5331866"/>
+            <a:off x="4532681" y="5416274"/>
             <a:ext cx="84125" cy="33833"/>
           </a:xfrm>
           <a:prstGeom prst="rect">
@@ -2782,7 +2770,7 @@
         </p:nvSpPr>
         <p:spPr>
           <a:xfrm rot="18900000">
-            <a:off x="4570171" y="5309921"/>
+            <a:off x="4570171" y="5394329"/>
             <a:ext cx="125273" cy="33833"/>
           </a:xfrm>
           <a:prstGeom prst="rect">
@@ -2819,7 +2807,7 @@
         </p:nvSpPr>
         <p:spPr>
           <a:xfrm>
-            <a:off x="4882896" y="5187391"/>
+            <a:off x="4882896" y="5271799"/>
             <a:ext cx="2916936" cy="310896"/>
           </a:xfrm>
           <a:prstGeom prst="rect">
@@ -2845,45 +2833,6 @@
                 <a:ea typeface="Arial"/>
               </a:rPr>
               <a:t>Waveform reconstruction</a:t>
-            </a:r>
-          </a:p>
-        </p:txBody>
-      </p:sp>
-      <p:sp>
-        <p:nvSpPr>
-          <p:cNvPr id="100053" name="S04.Single.Scope"/>
-          <p:cNvSpPr txBox="1"/>
-          <p:nvPr/>
-        </p:nvSpPr>
-        <p:spPr>
-          <a:xfrm>
-            <a:off x="4407408" y="5577840"/>
-            <a:ext cx="3383280" cy="228600"/>
-          </a:xfrm>
-          <a:prstGeom prst="rect">
-            <a:avLst/>
-          </a:prstGeom>
-          <a:noFill/>
-          <a:ln>
-            <a:noFill/>
-          </a:ln>
-        </p:spPr>
-        <p:txBody>
-          <a:bodyPr lIns="0" tIns="0" rIns="0" bIns="0">
-            <a:noAutofit/>
-          </a:bodyPr>
-          <a:lstStyle/>
-          <a:p>
-            <a:pPr algn="ctr"/>
-            <a:r>
-              <a:rPr lang="en-US" sz="1200">
-                <a:solidFill>
-                  <a:srgbClr val="607184"/>
-                </a:solidFill>
-                <a:latin typeface="Arial"/>
-                <a:ea typeface="Arial"/>
-              </a:rPr>
-              <a:t>Replay within single-FPGA capacity</a:t>
             </a:r>
           </a:p>
         </p:txBody>
@@ -3050,7 +2999,7 @@
         </p:nvSpPr>
         <p:spPr>
           <a:xfrm>
-            <a:off x="8394192" y="3364992"/>
+            <a:off x="8394192" y="3449400"/>
             <a:ext cx="265176" cy="265176"/>
           </a:xfrm>
           <a:prstGeom prst="ellipse">
@@ -3087,7 +3036,7 @@
         </p:nvSpPr>
         <p:spPr>
           <a:xfrm rot="2700000">
-            <a:off x="8455457" y="3503066"/>
+            <a:off x="8455457" y="3587474"/>
             <a:ext cx="84125" cy="33833"/>
           </a:xfrm>
           <a:prstGeom prst="rect">
@@ -3124,7 +3073,7 @@
         </p:nvSpPr>
         <p:spPr>
           <a:xfrm rot="18900000">
-            <a:off x="8492947" y="3481121"/>
+            <a:off x="8492947" y="3565529"/>
             <a:ext cx="125273" cy="33833"/>
           </a:xfrm>
           <a:prstGeom prst="rect">
@@ -3161,7 +3110,7 @@
         </p:nvSpPr>
         <p:spPr>
           <a:xfrm>
-            <a:off x="8805672" y="3358591"/>
+            <a:off x="8805672" y="3442999"/>
             <a:ext cx="2916936" cy="310896"/>
           </a:xfrm>
           <a:prstGeom prst="rect">
@@ -3199,7 +3148,7 @@
         </p:nvSpPr>
         <p:spPr>
           <a:xfrm>
-            <a:off x="8394192" y="3730752"/>
+            <a:off x="8394192" y="3815160"/>
             <a:ext cx="265176" cy="265176"/>
           </a:xfrm>
           <a:prstGeom prst="ellipse">
@@ -3236,7 +3185,7 @@
         </p:nvSpPr>
         <p:spPr>
           <a:xfrm rot="2700000">
-            <a:off x="8455457" y="3868826"/>
+            <a:off x="8455457" y="3953234"/>
             <a:ext cx="84125" cy="33833"/>
           </a:xfrm>
           <a:prstGeom prst="rect">
@@ -3273,7 +3222,7 @@
         </p:nvSpPr>
         <p:spPr>
           <a:xfrm rot="18900000">
-            <a:off x="8492947" y="3846881"/>
+            <a:off x="8492947" y="3931289"/>
             <a:ext cx="125273" cy="33833"/>
           </a:xfrm>
           <a:prstGeom prst="rect">
@@ -3310,7 +3259,7 @@
         </p:nvSpPr>
         <p:spPr>
           <a:xfrm>
-            <a:off x="8805672" y="3724351"/>
+            <a:off x="8805672" y="3808759"/>
             <a:ext cx="2916936" cy="310896"/>
           </a:xfrm>
           <a:prstGeom prst="rect">
@@ -3348,7 +3297,7 @@
         </p:nvSpPr>
         <p:spPr>
           <a:xfrm>
-            <a:off x="8394192" y="4096512"/>
+            <a:off x="8394192" y="4180920"/>
             <a:ext cx="265176" cy="265176"/>
           </a:xfrm>
           <a:prstGeom prst="ellipse">
@@ -3385,7 +3334,7 @@
         </p:nvSpPr>
         <p:spPr>
           <a:xfrm rot="2700000">
-            <a:off x="8455457" y="4234586"/>
+            <a:off x="8455457" y="4318994"/>
             <a:ext cx="84125" cy="33833"/>
           </a:xfrm>
           <a:prstGeom prst="rect">
@@ -3422,7 +3371,7 @@
         </p:nvSpPr>
         <p:spPr>
           <a:xfrm rot="18900000">
-            <a:off x="8492947" y="4212641"/>
+            <a:off x="8492947" y="4297049"/>
             <a:ext cx="125273" cy="33833"/>
           </a:xfrm>
           <a:prstGeom prst="rect">
@@ -3459,7 +3408,7 @@
         </p:nvSpPr>
         <p:spPr>
           <a:xfrm>
-            <a:off x="8805672" y="4090111"/>
+            <a:off x="8805672" y="4174519"/>
             <a:ext cx="2916936" cy="310896"/>
           </a:xfrm>
           <a:prstGeom prst="rect">
@@ -3497,7 +3446,7 @@
         </p:nvSpPr>
         <p:spPr>
           <a:xfrm>
-            <a:off x="8394192" y="4462272"/>
+            <a:off x="8394192" y="4546680"/>
             <a:ext cx="265176" cy="265176"/>
           </a:xfrm>
           <a:prstGeom prst="ellipse">
@@ -3534,7 +3483,7 @@
         </p:nvSpPr>
         <p:spPr>
           <a:xfrm rot="2700000">
-            <a:off x="8455457" y="4600346"/>
+            <a:off x="8455457" y="4684754"/>
             <a:ext cx="84125" cy="33833"/>
           </a:xfrm>
           <a:prstGeom prst="rect">
@@ -3571,7 +3520,7 @@
         </p:nvSpPr>
         <p:spPr>
           <a:xfrm rot="18900000">
-            <a:off x="8492947" y="4578401"/>
+            <a:off x="8492947" y="4662809"/>
             <a:ext cx="125273" cy="33833"/>
           </a:xfrm>
           <a:prstGeom prst="rect">
@@ -3608,7 +3557,7 @@
         </p:nvSpPr>
         <p:spPr>
           <a:xfrm>
-            <a:off x="8805672" y="4455871"/>
+            <a:off x="8805672" y="4540279"/>
             <a:ext cx="2916936" cy="310896"/>
           </a:xfrm>
           <a:prstGeom prst="rect">
@@ -3646,7 +3595,7 @@
         </p:nvSpPr>
         <p:spPr>
           <a:xfrm>
-            <a:off x="8394192" y="4828032"/>
+            <a:off x="8394192" y="4912440"/>
             <a:ext cx="265176" cy="265176"/>
           </a:xfrm>
           <a:prstGeom prst="ellipse">
@@ -3683,7 +3632,7 @@
         </p:nvSpPr>
         <p:spPr>
           <a:xfrm rot="2700000">
-            <a:off x="8455457" y="4966106"/>
+            <a:off x="8455457" y="5050514"/>
             <a:ext cx="84125" cy="33833"/>
           </a:xfrm>
           <a:prstGeom prst="rect">
@@ -3720,7 +3669,7 @@
         </p:nvSpPr>
         <p:spPr>
           <a:xfrm rot="18900000">
-            <a:off x="8492947" y="4944161"/>
+            <a:off x="8492947" y="5028569"/>
             <a:ext cx="125273" cy="33833"/>
           </a:xfrm>
           <a:prstGeom prst="rect">
@@ -3757,7 +3706,7 @@
         </p:nvSpPr>
         <p:spPr>
           <a:xfrm>
-            <a:off x="8805672" y="4821631"/>
+            <a:off x="8805672" y="4906039"/>
             <a:ext cx="2916936" cy="310896"/>
           </a:xfrm>
           <a:prstGeom prst="rect">
@@ -3795,7 +3744,7 @@
         </p:nvSpPr>
         <p:spPr>
           <a:xfrm>
-            <a:off x="8394192" y="5193792"/>
+            <a:off x="8394192" y="5278200"/>
             <a:ext cx="265176" cy="265176"/>
           </a:xfrm>
           <a:prstGeom prst="ellipse">
@@ -3832,7 +3781,7 @@
         </p:nvSpPr>
         <p:spPr>
           <a:xfrm rot="2700000">
-            <a:off x="8455457" y="5331866"/>
+            <a:off x="8455457" y="5416274"/>
             <a:ext cx="84125" cy="33833"/>
           </a:xfrm>
           <a:prstGeom prst="rect">
@@ -3869,7 +3818,7 @@
         </p:nvSpPr>
         <p:spPr>
           <a:xfrm rot="18900000">
-            <a:off x="8492947" y="5309921"/>
+            <a:off x="8492947" y="5394329"/>
             <a:ext cx="125273" cy="33833"/>
           </a:xfrm>
           <a:prstGeom prst="rect">
@@ -3906,7 +3855,7 @@
         </p:nvSpPr>
         <p:spPr>
           <a:xfrm>
-            <a:off x="8805672" y="5187391"/>
+            <a:off x="8805672" y="5271799"/>
             <a:ext cx="2916936" cy="310896"/>
           </a:xfrm>
           <a:prstGeom prst="rect">
@@ -3936,45 +3885,6 @@
           </a:p>
         </p:txBody>
       </p:sp>
-      <p:sp>
-        <p:nvSpPr>
-          <p:cNvPr id="100082" name="S04.REMUS.Scope"/>
-          <p:cNvSpPr txBox="1"/>
-          <p:nvPr/>
-        </p:nvSpPr>
-        <p:spPr>
-          <a:xfrm>
-            <a:off x="8330184" y="5577840"/>
-            <a:ext cx="3383280" cy="228600"/>
-          </a:xfrm>
-          <a:prstGeom prst="rect">
-            <a:avLst/>
-          </a:prstGeom>
-          <a:noFill/>
-          <a:ln>
-            <a:noFill/>
-          </a:ln>
-        </p:spPr>
-        <p:txBody>
-          <a:bodyPr lIns="0" tIns="0" rIns="0" bIns="0">
-            <a:noAutofit/>
-          </a:bodyPr>
-          <a:lstStyle/>
-          <a:p>
-            <a:pPr algn="ctr"/>
-            <a:r>
-              <a:rPr lang="en-US" sz="1200">
-                <a:solidFill>
-                  <a:srgbClr val="607184"/>
-                </a:solidFill>
-                <a:latin typeface="Arial"/>
-                <a:ea typeface="Arial"/>
-              </a:rPr>
-              <a:t>Target capabilities; validation follows</a:t>
-            </a:r>
-          </a:p>
-        </p:txBody>
-      </p:sp>
       <p:pic>
         <p:nvPicPr>
           <p:cNvPr id="100083" name="S04.Prototype.Left" descr="FPGA chip"/>
@@ -3984,7 +3894,7 @@
           <p:nvPr/>
         </p:nvPicPr>
         <p:blipFill>
-          <a:blip xmlns:r="http://schemas.openxmlformats.org/officeDocument/2006/relationships" r:embed="R08226750bf5e47db"/>
+          <a:blip xmlns:r="http://schemas.openxmlformats.org/officeDocument/2006/relationships" r:embed="R2e1b491f04ca4d45"/>
           <a:srcRect l="21371" t="23684" r="21291" b="20972"/>
           <a:stretch>
             <a:fillRect/>
@@ -4009,7 +3919,7 @@
           <p:nvPr/>
         </p:nvPicPr>
         <p:blipFill>
-          <a:blip xmlns:r="http://schemas.openxmlformats.org/officeDocument/2006/relationships" r:embed="R93796b2a57774adb"/>
+          <a:blip xmlns:r="http://schemas.openxmlformats.org/officeDocument/2006/relationships" r:embed="Rc469a79aa2dc4e3e"/>
           <a:srcRect l="21371" t="23684" r="21291" b="20972"/>
           <a:stretch>
             <a:fillRect/>
@@ -4071,7 +3981,7 @@
           <p:nvPr/>
         </p:nvPicPr>
         <p:blipFill>
-          <a:blip xmlns:r="http://schemas.openxmlformats.org/officeDocument/2006/relationships" r:embed="R9089391c6d9940e4"/>
+          <a:blip xmlns:r="http://schemas.openxmlformats.org/officeDocument/2006/relationships" r:embed="Rc7c7ca0e50a74076"/>
           <a:srcRect l="21371" t="23684" r="21291" b="20972"/>
           <a:stretch>
             <a:fillRect/>
@@ -4211,7 +4121,7 @@
           <p:nvPr/>
         </p:nvPicPr>
         <p:blipFill>
-          <a:blip xmlns:r="http://schemas.openxmlformats.org/officeDocument/2006/relationships" r:embed="Rddba46406b7a4c63"/>
+          <a:blip xmlns:r="http://schemas.openxmlformats.org/officeDocument/2006/relationships" r:embed="Rc173b3d7698c4342"/>
           <a:srcRect l="16746" t="16427" r="16746" b="11961"/>
           <a:stretch>
             <a:fillRect/>
@@ -4262,7 +4172,7 @@
           <p:nvPr/>
         </p:nvPicPr>
         <p:blipFill>
-          <a:blip xmlns:r="http://schemas.openxmlformats.org/officeDocument/2006/relationships" r:embed="Rccc30015c29b4f12"/>
+          <a:blip xmlns:r="http://schemas.openxmlformats.org/officeDocument/2006/relationships" r:embed="Ra64f2a7bc3424224"/>
           <a:srcRect l="21371" t="23684" r="21291" b="20972"/>
           <a:stretch>
             <a:fillRect/>
@@ -4287,7 +4197,7 @@
           <p:nvPr/>
         </p:nvPicPr>
         <p:blipFill>
-          <a:blip xmlns:r="http://schemas.openxmlformats.org/officeDocument/2006/relationships" r:embed="R3087888df6c94e56"/>
+          <a:blip xmlns:r="http://schemas.openxmlformats.org/officeDocument/2006/relationships" r:embed="R2525133ad447425c"/>
           <a:srcRect l="21371" t="23684" r="21291" b="20972"/>
           <a:stretch>
             <a:fillRect/>
@@ -4349,7 +4259,7 @@
           <p:nvPr/>
         </p:nvPicPr>
         <p:blipFill>
-          <a:blip xmlns:r="http://schemas.openxmlformats.org/officeDocument/2006/relationships" r:embed="Rc1bcec8b0ec84c3a"/>
+          <a:blip xmlns:r="http://schemas.openxmlformats.org/officeDocument/2006/relationships" r:embed="Ra3aaea55b5a64e1b"/>
           <a:srcRect l="13476" t="12679" r="12200" b="13237"/>
           <a:stretch>
             <a:fillRect/>
@@ -4374,7 +4284,7 @@
           <p:nvPr/>
         </p:nvPicPr>
         <p:blipFill>
-          <a:blip xmlns:r="http://schemas.openxmlformats.org/officeDocument/2006/relationships" r:embed="Rbc8b3cfe85344baa"/>
+          <a:blip xmlns:r="http://schemas.openxmlformats.org/officeDocument/2006/relationships" r:embed="Rd6291934e8654d4c"/>
           <a:srcRect l="16746" t="16427" r="16746" b="11961"/>
           <a:stretch>
             <a:fillRect/>
@@ -4398,7 +4308,7 @@
         </p:nvSpPr>
         <p:spPr>
           <a:xfrm>
-            <a:off x="320040" y="6016752"/>
+            <a:off x="316992" y="6054242"/>
             <a:ext cx="11558016" cy="576072"/>
           </a:xfrm>
           <a:prstGeom prst="roundRect">
@@ -4431,273 +4341,14 @@
       </p:sp>
       <p:sp>
         <p:nvSpPr>
-          <p:cNvPr id="100098" name="S04.Goal.Target0"/>
-          <p:cNvSpPr/>
-          <p:nvPr/>
-        </p:nvSpPr>
-        <p:spPr>
-          <a:xfrm>
-            <a:off x="900684" y="6089904"/>
-            <a:ext cx="429768" cy="429768"/>
-          </a:xfrm>
-          <a:prstGeom prst="ellipse">
-            <a:avLst/>
-          </a:prstGeom>
-          <a:solidFill>
-            <a:srgbClr val="DF973E"/>
-          </a:solidFill>
-          <a:ln>
-            <a:noFill/>
-          </a:ln>
-        </p:spPr>
-        <p:txBody>
-          <a:bodyPr lIns="0" tIns="0" rIns="0" bIns="0">
-            <a:noAutofit/>
-          </a:bodyPr>
-          <a:lstStyle/>
-          <a:p>
-            <a:endParaRPr lang="en-US" sz="1800">
-              <a:solidFill>
-                <a:srgbClr val="20354A"/>
-              </a:solidFill>
-              <a:latin typeface="Arial"/>
-              <a:ea typeface="Arial"/>
-            </a:endParaRPr>
-          </a:p>
-        </p:txBody>
-      </p:sp>
-      <p:sp>
-        <p:nvSpPr>
-          <p:cNvPr id="100099" name="S04.Goal.Target1"/>
-          <p:cNvSpPr/>
-          <p:nvPr/>
-        </p:nvSpPr>
-        <p:spPr>
-          <a:xfrm>
-            <a:off x="955548" y="6144768"/>
-            <a:ext cx="320040" cy="320040"/>
-          </a:xfrm>
-          <a:prstGeom prst="ellipse">
-            <a:avLst/>
-          </a:prstGeom>
-          <a:solidFill>
-            <a:srgbClr val="FFFFFF"/>
-          </a:solidFill>
-          <a:ln>
-            <a:noFill/>
-          </a:ln>
-        </p:spPr>
-        <p:txBody>
-          <a:bodyPr lIns="0" tIns="0" rIns="0" bIns="0">
-            <a:noAutofit/>
-          </a:bodyPr>
-          <a:lstStyle/>
-          <a:p>
-            <a:endParaRPr lang="en-US" sz="1800">
-              <a:solidFill>
-                <a:srgbClr val="20354A"/>
-              </a:solidFill>
-              <a:latin typeface="Arial"/>
-              <a:ea typeface="Arial"/>
-            </a:endParaRPr>
-          </a:p>
-        </p:txBody>
-      </p:sp>
-      <p:sp>
-        <p:nvSpPr>
-          <p:cNvPr id="100100" name="S04.Goal.Target2"/>
-          <p:cNvSpPr/>
-          <p:nvPr/>
-        </p:nvSpPr>
-        <p:spPr>
-          <a:xfrm>
-            <a:off x="1001268" y="6190488"/>
-            <a:ext cx="228600" cy="228600"/>
-          </a:xfrm>
-          <a:prstGeom prst="ellipse">
-            <a:avLst/>
-          </a:prstGeom>
-          <a:solidFill>
-            <a:srgbClr val="DF973E"/>
-          </a:solidFill>
-          <a:ln>
-            <a:noFill/>
-          </a:ln>
-        </p:spPr>
-        <p:txBody>
-          <a:bodyPr lIns="0" tIns="0" rIns="0" bIns="0">
-            <a:noAutofit/>
-          </a:bodyPr>
-          <a:lstStyle/>
-          <a:p>
-            <a:endParaRPr lang="en-US" sz="1800">
-              <a:solidFill>
-                <a:srgbClr val="20354A"/>
-              </a:solidFill>
-              <a:latin typeface="Arial"/>
-              <a:ea typeface="Arial"/>
-            </a:endParaRPr>
-          </a:p>
-        </p:txBody>
-      </p:sp>
-      <p:sp>
-        <p:nvSpPr>
-          <p:cNvPr id="100101" name="S04.Goal.Target3"/>
-          <p:cNvSpPr/>
-          <p:nvPr/>
-        </p:nvSpPr>
-        <p:spPr>
-          <a:xfrm>
-            <a:off x="1056132" y="6245352"/>
-            <a:ext cx="118872" cy="118872"/>
-          </a:xfrm>
-          <a:prstGeom prst="ellipse">
-            <a:avLst/>
-          </a:prstGeom>
-          <a:solidFill>
-            <a:srgbClr val="FFFFFF"/>
-          </a:solidFill>
-          <a:ln>
-            <a:noFill/>
-          </a:ln>
-        </p:spPr>
-        <p:txBody>
-          <a:bodyPr lIns="0" tIns="0" rIns="0" bIns="0">
-            <a:noAutofit/>
-          </a:bodyPr>
-          <a:lstStyle/>
-          <a:p>
-            <a:endParaRPr lang="en-US" sz="1800">
-              <a:solidFill>
-                <a:srgbClr val="20354A"/>
-              </a:solidFill>
-              <a:latin typeface="Arial"/>
-              <a:ea typeface="Arial"/>
-            </a:endParaRPr>
-          </a:p>
-        </p:txBody>
-      </p:sp>
-      <p:sp>
-        <p:nvSpPr>
-          <p:cNvPr id="100102" name="S04.Goal.Target4"/>
-          <p:cNvSpPr/>
-          <p:nvPr/>
-        </p:nvSpPr>
-        <p:spPr>
-          <a:xfrm>
-            <a:off x="1085850" y="6275070"/>
-            <a:ext cx="59436" cy="59436"/>
-          </a:xfrm>
-          <a:prstGeom prst="ellipse">
-            <a:avLst/>
-          </a:prstGeom>
-          <a:solidFill>
-            <a:srgbClr val="DF973E"/>
-          </a:solidFill>
-          <a:ln>
-            <a:noFill/>
-          </a:ln>
-        </p:spPr>
-        <p:txBody>
-          <a:bodyPr lIns="0" tIns="0" rIns="0" bIns="0">
-            <a:noAutofit/>
-          </a:bodyPr>
-          <a:lstStyle/>
-          <a:p>
-            <a:endParaRPr lang="en-US" sz="1800">
-              <a:solidFill>
-                <a:srgbClr val="20354A"/>
-              </a:solidFill>
-              <a:latin typeface="Arial"/>
-              <a:ea typeface="Arial"/>
-            </a:endParaRPr>
-          </a:p>
-        </p:txBody>
-      </p:sp>
-      <p:sp>
-        <p:nvSpPr>
-          <p:cNvPr id="100103" name="S04.Goal.Arrow"/>
-          <p:cNvSpPr/>
-          <p:nvPr/>
-        </p:nvSpPr>
-        <p:spPr>
-          <a:xfrm rot="18900000">
-            <a:off x="1138428" y="6089904"/>
-            <a:ext cx="265176" cy="91440"/>
-          </a:xfrm>
-          <a:prstGeom prst="rightArrow">
-            <a:avLst/>
-          </a:prstGeom>
-          <a:solidFill>
-            <a:srgbClr val="DF973E"/>
-          </a:solidFill>
-          <a:ln>
-            <a:noFill/>
-          </a:ln>
-        </p:spPr>
-        <p:txBody>
-          <a:bodyPr lIns="0" tIns="0" rIns="0" bIns="0">
-            <a:noAutofit/>
-          </a:bodyPr>
-          <a:lstStyle/>
-          <a:p>
-            <a:endParaRPr lang="en-US" sz="1800">
-              <a:solidFill>
-                <a:srgbClr val="20354A"/>
-              </a:solidFill>
-              <a:latin typeface="Arial"/>
-              <a:ea typeface="Arial"/>
-            </a:endParaRPr>
-          </a:p>
-        </p:txBody>
-      </p:sp>
-      <p:sp>
-        <p:nvSpPr>
-          <p:cNvPr id="100104" name="S04.Goal.Divider"/>
-          <p:cNvSpPr/>
-          <p:nvPr/>
-        </p:nvSpPr>
-        <p:spPr>
-          <a:xfrm>
-            <a:off x="1801368" y="6117336"/>
-            <a:ext cx="8230" cy="365760"/>
-          </a:xfrm>
-          <a:prstGeom prst="rect">
-            <a:avLst/>
-          </a:prstGeom>
-          <a:solidFill>
-            <a:srgbClr val="BDCBD4"/>
-          </a:solidFill>
-          <a:ln>
-            <a:noFill/>
-          </a:ln>
-        </p:spPr>
-        <p:txBody>
-          <a:bodyPr lIns="0" tIns="0" rIns="0" bIns="0">
-            <a:noAutofit/>
-          </a:bodyPr>
-          <a:lstStyle/>
-          <a:p>
-            <a:endParaRPr lang="en-US" sz="1800">
-              <a:solidFill>
-                <a:srgbClr val="20354A"/>
-              </a:solidFill>
-              <a:latin typeface="Arial"/>
-              <a:ea typeface="Arial"/>
-            </a:endParaRPr>
-          </a:p>
-        </p:txBody>
-      </p:sp>
-      <p:sp>
-        <p:nvSpPr>
           <p:cNvPr id="100105" name="S04.Goal.Text"/>
           <p:cNvSpPr txBox="1"/>
           <p:nvPr/>
         </p:nvSpPr>
         <p:spPr>
           <a:xfrm>
-            <a:off x="2066544" y="6062472"/>
-            <a:ext cx="9500616" cy="502920"/>
+            <a:off x="1100392" y="6201560"/>
+            <a:ext cx="10800876" cy="393192"/>
           </a:xfrm>
           <a:prstGeom prst="rect">
             <a:avLst/>
@@ -4713,27 +4364,41 @@
           </a:bodyPr>
           <a:lstStyle/>
           <a:p>
+            <a:pPr algn="l">
+              <a:defRPr sz="1800" b="0">
+                <a:solidFill>
+                  <a:srgbClr val="183B56"/>
+                </a:solidFill>
+                <a:latin typeface="Arial"/>
+                <a:ea typeface="Arial"/>
+              </a:defRPr>
+            </a:pPr>
             <a:r>
               <a:rPr lang="en-US" sz="1800">
                 <a:solidFill>
                   <a:srgbClr val="183B56"/>
                 </a:solidFill>
                 <a:latin typeface="Arial"/>
-                <a:ea typeface="Arial"/>
               </a:rPr>
-              <a:t>Goal: combine multi-FPGA scalability with replayable emulation</a:t>
+              <a:t xml:space="preserve">Goal: combine multi-FPGA scalability with </a:t>
             </a:r>
-          </a:p>
-          <a:p>
             <a:r>
               <a:rPr lang="en-US" sz="1800">
                 <a:solidFill>
                   <a:srgbClr val="183B56"/>
                 </a:solidFill>
                 <a:latin typeface="Arial"/>
-                <a:ea typeface="Arial"/>
               </a:rPr>
-              <a:t>for large-scale SoC debugging.</a:t>
+              <a:t>replayable</a:t>
+            </a:r>
+            <a:r>
+              <a:rPr lang="en-US" sz="1800">
+                <a:solidFill>
+                  <a:srgbClr val="183B56"/>
+                </a:solidFill>
+                <a:latin typeface="Arial"/>
+              </a:rPr>
+              <a:t xml:space="preserve"> emulation for large-scale SoC debugging</a:t>
             </a:r>
           </a:p>
         </p:txBody>

--- a/pptx/midterm/REMUS_Background_Slide_4.pptx
+++ b/pptx/midterm/REMUS_Background_Slide_4.pptx
@@ -5,10 +5,10 @@
     <p:sldMasterId xmlns:r="http://schemas.openxmlformats.org/officeDocument/2006/relationships" id="2147483648" r:id="rId1"/>
   </p:sldMasterIdLst>
   <p:notesMasterIdLst>
-    <p:notesMasterId r:id="R1f61dc5011b84f30"/>
+    <p:notesMasterId r:id="R765ee3db0f344837"/>
   </p:notesMasterIdLst>
   <p:sldIdLst>
-    <p:sldId id="256" r:id="Rf0d0dbb4431444da"/>
+    <p:sldId id="256" r:id="Rf37371ec718b4afe"/>
   </p:sldIdLst>
   <p:sldSz cx="12192000" cy="6858000" type="screen16x9"/>
   <p:notesSz cx="6858000" cy="9144000"/>
@@ -337,13 +337,13 @@
         <a:srgbClr val="E7E6E6"/>
       </a:lt2>
       <a:accent1>
-        <a:srgbClr val="183B56"/>
+        <a:srgbClr val="C00000"/>
       </a:accent1>
       <a:accent2>
-        <a:srgbClr val="008C95"/>
+        <a:srgbClr val="70AD47"/>
       </a:accent2>
       <a:accent3>
-        <a:srgbClr val="DF973E"/>
+        <a:srgbClr val="ED7D31"/>
       </a:accent3>
       <a:accent4>
         <a:srgbClr val="FFC000"/>
@@ -821,7 +821,7 @@
               </a:lnSpc>
               <a:defRPr sz="3200" b="1">
                 <a:solidFill>
-                  <a:srgbClr val="183B56"/>
+                  <a:srgbClr val="C00000"/>
                 </a:solidFill>
                 <a:latin typeface="Arial"/>
                 <a:ea typeface="Arial"/>
@@ -830,7 +830,7 @@
             <a:r>
               <a:rPr sz="3200" b="1">
                 <a:solidFill>
-                  <a:srgbClr val="183B56"/>
+                  <a:srgbClr val="C00000"/>
                 </a:solidFill>
                 <a:latin typeface="Arial"/>
               </a:rPr>
@@ -854,21 +854,23 @@
             <a:avLst/>
           </a:prstGeom>
           <a:solidFill>
-            <a:srgbClr val="008C95"/>
-          </a:solidFill>
-          <a:ln>
-            <a:noFill/>
-          </a:ln>
-        </p:spPr>
-        <p:txBody>
-          <a:bodyPr lIns="0" tIns="0" rIns="0" bIns="0">
-            <a:noAutofit/>
-          </a:bodyPr>
-          <a:lstStyle/>
-          <a:p>
-            <a:endParaRPr lang="en-US" sz="1800">
-              <a:solidFill>
-                <a:srgbClr val="20354A"/>
+            <a:srgbClr val="C55A11"/>
+          </a:solidFill>
+          <a:ln>
+            <a:solidFill>
+              <a:srgbClr val="C55A11"/>
+            </a:solidFill>
+          </a:ln>
+        </p:spPr>
+        <p:txBody>
+          <a:bodyPr lIns="0" tIns="0" rIns="0" bIns="0">
+            <a:noAutofit/>
+          </a:bodyPr>
+          <a:lstStyle/>
+          <a:p>
+            <a:endParaRPr lang="en-US" sz="1800">
+              <a:solidFill>
+                <a:srgbClr val="C55A11"/>
               </a:solidFill>
               <a:latin typeface="Arial"/>
               <a:ea typeface="Arial"/>
@@ -893,21 +895,21 @@
             </a:avLst>
           </a:prstGeom>
           <a:solidFill>
-            <a:srgbClr val="EAF4F3"/>
-          </a:solidFill>
-          <a:ln>
-            <a:noFill/>
-          </a:ln>
-        </p:spPr>
-        <p:txBody>
-          <a:bodyPr lIns="0" tIns="0" rIns="0" bIns="0">
-            <a:noAutofit/>
-          </a:bodyPr>
-          <a:lstStyle/>
-          <a:p>
-            <a:endParaRPr lang="en-US" sz="1800">
-              <a:solidFill>
-                <a:srgbClr val="20354A"/>
+            <a:srgbClr val="F1F7EC"/>
+          </a:solidFill>
+          <a:ln>
+            <a:noFill/>
+          </a:ln>
+        </p:spPr>
+        <p:txBody>
+          <a:bodyPr lIns="0" tIns="0" rIns="0" bIns="0">
+            <a:noAutofit/>
+          </a:bodyPr>
+          <a:lstStyle/>
+          <a:p>
+            <a:endParaRPr lang="en-US" sz="1800">
+              <a:solidFill>
+                <a:srgbClr val="1F1F1F"/>
               </a:solidFill>
               <a:latin typeface="Arial"/>
               <a:ea typeface="Arial"/>
@@ -944,7 +946,7 @@
             <a:r>
               <a:rPr lang="en-US" sz="2100" b="1">
                 <a:solidFill>
-                  <a:srgbClr val="183B56"/>
+                  <a:srgbClr val="333333"/>
                 </a:solidFill>
                 <a:latin typeface="Arial"/>
                 <a:ea typeface="Arial"/>
@@ -957,7 +959,7 @@
             <a:r>
               <a:rPr lang="en-US" sz="2100" b="1">
                 <a:solidFill>
-                  <a:srgbClr val="183B56"/>
+                  <a:srgbClr val="333333"/>
                 </a:solidFill>
                 <a:latin typeface="Arial"/>
                 <a:ea typeface="Arial"/>
@@ -995,7 +997,7 @@
             <a:pPr algn="ctr">
               <a:defRPr sz="1400" b="0">
                 <a:solidFill>
-                  <a:srgbClr val="607184"/>
+                  <a:srgbClr val="898989"/>
                 </a:solidFill>
                 <a:latin typeface="Arial"/>
                 <a:ea typeface="Arial"/>
@@ -1004,7 +1006,7 @@
             <a:r>
               <a:rPr sz="1400">
                 <a:solidFill>
-                  <a:srgbClr val="607184"/>
+                  <a:srgbClr val="898989"/>
                 </a:solidFill>
                 <a:latin typeface="Arial"/>
                 <a:ea typeface="Arial"/>
@@ -1029,21 +1031,21 @@
             <a:avLst/>
           </a:prstGeom>
           <a:solidFill>
-            <a:srgbClr val="BDCBD4"/>
-          </a:solidFill>
-          <a:ln>
-            <a:noFill/>
-          </a:ln>
-        </p:spPr>
-        <p:txBody>
-          <a:bodyPr lIns="0" tIns="0" rIns="0" bIns="0">
-            <a:noAutofit/>
-          </a:bodyPr>
-          <a:lstStyle/>
-          <a:p>
-            <a:endParaRPr lang="en-US" sz="1800">
-              <a:solidFill>
-                <a:srgbClr val="20354A"/>
+            <a:srgbClr val="D1D1D1"/>
+          </a:solidFill>
+          <a:ln>
+            <a:noFill/>
+          </a:ln>
+        </p:spPr>
+        <p:txBody>
+          <a:bodyPr lIns="0" tIns="0" rIns="0" bIns="0">
+            <a:noAutofit/>
+          </a:bodyPr>
+          <a:lstStyle/>
+          <a:p>
+            <a:endParaRPr lang="en-US" sz="1800">
+              <a:solidFill>
+                <a:srgbClr val="1F1F1F"/>
               </a:solidFill>
               <a:latin typeface="Arial"/>
               <a:ea typeface="Arial"/>
@@ -1066,21 +1068,21 @@
             <a:avLst/>
           </a:prstGeom>
           <a:solidFill>
-            <a:srgbClr val="008C95"/>
-          </a:solidFill>
-          <a:ln>
-            <a:noFill/>
-          </a:ln>
-        </p:spPr>
-        <p:txBody>
-          <a:bodyPr lIns="0" tIns="0" rIns="0" bIns="0">
-            <a:noAutofit/>
-          </a:bodyPr>
-          <a:lstStyle/>
-          <a:p>
-            <a:endParaRPr lang="en-US" sz="1800">
-              <a:solidFill>
-                <a:srgbClr val="20354A"/>
+            <a:srgbClr val="70AD47"/>
+          </a:solidFill>
+          <a:ln>
+            <a:noFill/>
+          </a:ln>
+        </p:spPr>
+        <p:txBody>
+          <a:bodyPr lIns="0" tIns="0" rIns="0" bIns="0">
+            <a:noAutofit/>
+          </a:bodyPr>
+          <a:lstStyle/>
+          <a:p>
+            <a:endParaRPr lang="en-US" sz="1800">
+              <a:solidFill>
+                <a:srgbClr val="1F1F1F"/>
               </a:solidFill>
               <a:latin typeface="Arial"/>
               <a:ea typeface="Arial"/>
@@ -1117,7 +1119,7 @@
           <a:p>
             <a:endParaRPr lang="en-US" sz="1800">
               <a:solidFill>
-                <a:srgbClr val="20354A"/>
+                <a:srgbClr val="1F1F1F"/>
               </a:solidFill>
               <a:latin typeface="Arial"/>
               <a:ea typeface="Arial"/>
@@ -1154,7 +1156,7 @@
           <a:p>
             <a:endParaRPr lang="en-US" sz="1800">
               <a:solidFill>
-                <a:srgbClr val="20354A"/>
+                <a:srgbClr val="1F1F1F"/>
               </a:solidFill>
               <a:latin typeface="Arial"/>
               <a:ea typeface="Arial"/>
@@ -1190,7 +1192,7 @@
             <a:r>
               <a:rPr lang="en-US" sz="1700">
                 <a:solidFill>
-                  <a:srgbClr val="20354A"/>
+                  <a:srgbClr val="1F1F1F"/>
                 </a:solidFill>
                 <a:latin typeface="Arial"/>
                 <a:ea typeface="Arial"/>
@@ -1215,21 +1217,21 @@
             <a:avLst/>
           </a:prstGeom>
           <a:solidFill>
-            <a:srgbClr val="008C95"/>
-          </a:solidFill>
-          <a:ln>
-            <a:noFill/>
-          </a:ln>
-        </p:spPr>
-        <p:txBody>
-          <a:bodyPr lIns="0" tIns="0" rIns="0" bIns="0">
-            <a:noAutofit/>
-          </a:bodyPr>
-          <a:lstStyle/>
-          <a:p>
-            <a:endParaRPr lang="en-US" sz="1800">
-              <a:solidFill>
-                <a:srgbClr val="20354A"/>
+            <a:srgbClr val="70AD47"/>
+          </a:solidFill>
+          <a:ln>
+            <a:noFill/>
+          </a:ln>
+        </p:spPr>
+        <p:txBody>
+          <a:bodyPr lIns="0" tIns="0" rIns="0" bIns="0">
+            <a:noAutofit/>
+          </a:bodyPr>
+          <a:lstStyle/>
+          <a:p>
+            <a:endParaRPr lang="en-US" sz="1800">
+              <a:solidFill>
+                <a:srgbClr val="1F1F1F"/>
               </a:solidFill>
               <a:latin typeface="Arial"/>
               <a:ea typeface="Arial"/>
@@ -1266,7 +1268,7 @@
           <a:p>
             <a:endParaRPr lang="en-US" sz="1800">
               <a:solidFill>
-                <a:srgbClr val="20354A"/>
+                <a:srgbClr val="1F1F1F"/>
               </a:solidFill>
               <a:latin typeface="Arial"/>
               <a:ea typeface="Arial"/>
@@ -1303,7 +1305,7 @@
           <a:p>
             <a:endParaRPr lang="en-US" sz="1800">
               <a:solidFill>
-                <a:srgbClr val="20354A"/>
+                <a:srgbClr val="1F1F1F"/>
               </a:solidFill>
               <a:latin typeface="Arial"/>
               <a:ea typeface="Arial"/>
@@ -1339,7 +1341,7 @@
             <a:r>
               <a:rPr lang="en-US" sz="1700">
                 <a:solidFill>
-                  <a:srgbClr val="20354A"/>
+                  <a:srgbClr val="1F1F1F"/>
                 </a:solidFill>
                 <a:latin typeface="Arial"/>
                 <a:ea typeface="Arial"/>
@@ -1364,21 +1366,21 @@
             <a:avLst/>
           </a:prstGeom>
           <a:solidFill>
-            <a:srgbClr val="DF973E"/>
-          </a:solidFill>
-          <a:ln>
-            <a:noFill/>
-          </a:ln>
-        </p:spPr>
-        <p:txBody>
-          <a:bodyPr lIns="0" tIns="0" rIns="0" bIns="0">
-            <a:noAutofit/>
-          </a:bodyPr>
-          <a:lstStyle/>
-          <a:p>
-            <a:endParaRPr lang="en-US" sz="1800">
-              <a:solidFill>
-                <a:srgbClr val="20354A"/>
+            <a:srgbClr val="ED7D31"/>
+          </a:solidFill>
+          <a:ln>
+            <a:noFill/>
+          </a:ln>
+        </p:spPr>
+        <p:txBody>
+          <a:bodyPr lIns="0" tIns="0" rIns="0" bIns="0">
+            <a:noAutofit/>
+          </a:bodyPr>
+          <a:lstStyle/>
+          <a:p>
+            <a:endParaRPr lang="en-US" sz="1800">
+              <a:solidFill>
+                <a:srgbClr val="1F1F1F"/>
               </a:solidFill>
               <a:latin typeface="Arial"/>
               <a:ea typeface="Arial"/>
@@ -1453,7 +1455,7 @@
             <a:r>
               <a:rPr lang="en-US" sz="1700">
                 <a:solidFill>
-                  <a:srgbClr val="20354A"/>
+                  <a:srgbClr val="1F1F1F"/>
                 </a:solidFill>
                 <a:latin typeface="Arial"/>
                 <a:ea typeface="Arial"/>
@@ -1478,21 +1480,21 @@
             <a:avLst/>
           </a:prstGeom>
           <a:solidFill>
-            <a:srgbClr val="DF973E"/>
-          </a:solidFill>
-          <a:ln>
-            <a:noFill/>
-          </a:ln>
-        </p:spPr>
-        <p:txBody>
-          <a:bodyPr lIns="0" tIns="0" rIns="0" bIns="0">
-            <a:noAutofit/>
-          </a:bodyPr>
-          <a:lstStyle/>
-          <a:p>
-            <a:endParaRPr lang="en-US" sz="1800">
-              <a:solidFill>
-                <a:srgbClr val="20354A"/>
+            <a:srgbClr val="ED7D31"/>
+          </a:solidFill>
+          <a:ln>
+            <a:noFill/>
+          </a:ln>
+        </p:spPr>
+        <p:txBody>
+          <a:bodyPr lIns="0" tIns="0" rIns="0" bIns="0">
+            <a:noAutofit/>
+          </a:bodyPr>
+          <a:lstStyle/>
+          <a:p>
+            <a:endParaRPr lang="en-US" sz="1800">
+              <a:solidFill>
+                <a:srgbClr val="1F1F1F"/>
               </a:solidFill>
               <a:latin typeface="Arial"/>
               <a:ea typeface="Arial"/>
@@ -1567,7 +1569,7 @@
             <a:r>
               <a:rPr lang="en-US" sz="1700">
                 <a:solidFill>
-                  <a:srgbClr val="20354A"/>
+                  <a:srgbClr val="1F1F1F"/>
                 </a:solidFill>
                 <a:latin typeface="Arial"/>
                 <a:ea typeface="Arial"/>
@@ -1592,21 +1594,21 @@
             <a:avLst/>
           </a:prstGeom>
           <a:solidFill>
-            <a:srgbClr val="DF973E"/>
-          </a:solidFill>
-          <a:ln>
-            <a:noFill/>
-          </a:ln>
-        </p:spPr>
-        <p:txBody>
-          <a:bodyPr lIns="0" tIns="0" rIns="0" bIns="0">
-            <a:noAutofit/>
-          </a:bodyPr>
-          <a:lstStyle/>
-          <a:p>
-            <a:endParaRPr lang="en-US" sz="1800">
-              <a:solidFill>
-                <a:srgbClr val="20354A"/>
+            <a:srgbClr val="ED7D31"/>
+          </a:solidFill>
+          <a:ln>
+            <a:noFill/>
+          </a:ln>
+        </p:spPr>
+        <p:txBody>
+          <a:bodyPr lIns="0" tIns="0" rIns="0" bIns="0">
+            <a:noAutofit/>
+          </a:bodyPr>
+          <a:lstStyle/>
+          <a:p>
+            <a:endParaRPr lang="en-US" sz="1800">
+              <a:solidFill>
+                <a:srgbClr val="1F1F1F"/>
               </a:solidFill>
               <a:latin typeface="Arial"/>
               <a:ea typeface="Arial"/>
@@ -1681,7 +1683,7 @@
             <a:r>
               <a:rPr lang="en-US" sz="1700">
                 <a:solidFill>
-                  <a:srgbClr val="20354A"/>
+                  <a:srgbClr val="1F1F1F"/>
                 </a:solidFill>
                 <a:latin typeface="Arial"/>
                 <a:ea typeface="Arial"/>
@@ -1706,21 +1708,21 @@
             <a:avLst/>
           </a:prstGeom>
           <a:solidFill>
-            <a:srgbClr val="DF973E"/>
-          </a:solidFill>
-          <a:ln>
-            <a:noFill/>
-          </a:ln>
-        </p:spPr>
-        <p:txBody>
-          <a:bodyPr lIns="0" tIns="0" rIns="0" bIns="0">
-            <a:noAutofit/>
-          </a:bodyPr>
-          <a:lstStyle/>
-          <a:p>
-            <a:endParaRPr lang="en-US" sz="1800">
-              <a:solidFill>
-                <a:srgbClr val="20354A"/>
+            <a:srgbClr val="ED7D31"/>
+          </a:solidFill>
+          <a:ln>
+            <a:noFill/>
+          </a:ln>
+        </p:spPr>
+        <p:txBody>
+          <a:bodyPr lIns="0" tIns="0" rIns="0" bIns="0">
+            <a:noAutofit/>
+          </a:bodyPr>
+          <a:lstStyle/>
+          <a:p>
+            <a:endParaRPr lang="en-US" sz="1800">
+              <a:solidFill>
+                <a:srgbClr val="1F1F1F"/>
               </a:solidFill>
               <a:latin typeface="Arial"/>
               <a:ea typeface="Arial"/>
@@ -1795,7 +1797,7 @@
             <a:r>
               <a:rPr lang="en-US" sz="1700">
                 <a:solidFill>
-                  <a:srgbClr val="20354A"/>
+                  <a:srgbClr val="1F1F1F"/>
                 </a:solidFill>
                 <a:latin typeface="Arial"/>
                 <a:ea typeface="Arial"/>
@@ -1822,21 +1824,21 @@
             </a:avLst>
           </a:prstGeom>
           <a:solidFill>
-            <a:srgbClr val="F1F5F8"/>
-          </a:solidFill>
-          <a:ln>
-            <a:noFill/>
-          </a:ln>
-        </p:spPr>
-        <p:txBody>
-          <a:bodyPr lIns="0" tIns="0" rIns="0" bIns="0">
-            <a:noAutofit/>
-          </a:bodyPr>
-          <a:lstStyle/>
-          <a:p>
-            <a:endParaRPr lang="en-US" sz="1800">
-              <a:solidFill>
-                <a:srgbClr val="20354A"/>
+            <a:srgbClr val="F5F5F5"/>
+          </a:solidFill>
+          <a:ln>
+            <a:noFill/>
+          </a:ln>
+        </p:spPr>
+        <p:txBody>
+          <a:bodyPr lIns="0" tIns="0" rIns="0" bIns="0">
+            <a:noAutofit/>
+          </a:bodyPr>
+          <a:lstStyle/>
+          <a:p>
+            <a:endParaRPr lang="en-US" sz="1800">
+              <a:solidFill>
+                <a:srgbClr val="1F1F1F"/>
               </a:solidFill>
               <a:latin typeface="Arial"/>
               <a:ea typeface="Arial"/>
@@ -1873,7 +1875,7 @@
             <a:r>
               <a:rPr lang="en-US" sz="2100" b="1">
                 <a:solidFill>
-                  <a:srgbClr val="183B56"/>
+                  <a:srgbClr val="333333"/>
                 </a:solidFill>
                 <a:latin typeface="Arial"/>
                 <a:ea typeface="Arial"/>
@@ -1886,7 +1888,7 @@
             <a:r>
               <a:rPr lang="en-US" sz="2100" b="1">
                 <a:solidFill>
-                  <a:srgbClr val="183B56"/>
+                  <a:srgbClr val="333333"/>
                 </a:solidFill>
                 <a:latin typeface="Arial"/>
                 <a:ea typeface="Arial"/>
@@ -1924,7 +1926,7 @@
             <a:pPr algn="ctr">
               <a:defRPr sz="1400" b="0">
                 <a:solidFill>
-                  <a:srgbClr val="607184"/>
+                  <a:srgbClr val="898989"/>
                 </a:solidFill>
                 <a:latin typeface="Arial"/>
                 <a:ea typeface="Arial"/>
@@ -1933,7 +1935,7 @@
             <a:r>
               <a:rPr sz="1400">
                 <a:solidFill>
-                  <a:srgbClr val="607184"/>
+                  <a:srgbClr val="898989"/>
                 </a:solidFill>
                 <a:latin typeface="Arial"/>
                 <a:ea typeface="Arial"/>
@@ -1958,21 +1960,21 @@
             <a:avLst/>
           </a:prstGeom>
           <a:solidFill>
-            <a:srgbClr val="BDCBD4"/>
-          </a:solidFill>
-          <a:ln>
-            <a:noFill/>
-          </a:ln>
-        </p:spPr>
-        <p:txBody>
-          <a:bodyPr lIns="0" tIns="0" rIns="0" bIns="0">
-            <a:noAutofit/>
-          </a:bodyPr>
-          <a:lstStyle/>
-          <a:p>
-            <a:endParaRPr lang="en-US" sz="1800">
-              <a:solidFill>
-                <a:srgbClr val="20354A"/>
+            <a:srgbClr val="D1D1D1"/>
+          </a:solidFill>
+          <a:ln>
+            <a:noFill/>
+          </a:ln>
+        </p:spPr>
+        <p:txBody>
+          <a:bodyPr lIns="0" tIns="0" rIns="0" bIns="0">
+            <a:noAutofit/>
+          </a:bodyPr>
+          <a:lstStyle/>
+          <a:p>
+            <a:endParaRPr lang="en-US" sz="1800">
+              <a:solidFill>
+                <a:srgbClr val="1F1F1F"/>
               </a:solidFill>
               <a:latin typeface="Arial"/>
               <a:ea typeface="Arial"/>
@@ -1995,21 +1997,21 @@
             <a:avLst/>
           </a:prstGeom>
           <a:solidFill>
-            <a:srgbClr val="DF973E"/>
-          </a:solidFill>
-          <a:ln>
-            <a:noFill/>
-          </a:ln>
-        </p:spPr>
-        <p:txBody>
-          <a:bodyPr lIns="0" tIns="0" rIns="0" bIns="0">
-            <a:noAutofit/>
-          </a:bodyPr>
-          <a:lstStyle/>
-          <a:p>
-            <a:endParaRPr lang="en-US" sz="1800">
-              <a:solidFill>
-                <a:srgbClr val="20354A"/>
+            <a:srgbClr val="ED7D31"/>
+          </a:solidFill>
+          <a:ln>
+            <a:noFill/>
+          </a:ln>
+        </p:spPr>
+        <p:txBody>
+          <a:bodyPr lIns="0" tIns="0" rIns="0" bIns="0">
+            <a:noAutofit/>
+          </a:bodyPr>
+          <a:lstStyle/>
+          <a:p>
+            <a:endParaRPr lang="en-US" sz="1800">
+              <a:solidFill>
+                <a:srgbClr val="1F1F1F"/>
               </a:solidFill>
               <a:latin typeface="Arial"/>
               <a:ea typeface="Arial"/>
@@ -2046,7 +2048,7 @@
           <a:p>
             <a:endParaRPr lang="en-US" sz="1800">
               <a:solidFill>
-                <a:srgbClr val="20354A"/>
+                <a:srgbClr val="1F1F1F"/>
               </a:solidFill>
               <a:latin typeface="Arial"/>
               <a:ea typeface="Arial"/>
@@ -2082,7 +2084,7 @@
             <a:r>
               <a:rPr lang="en-US" sz="1700">
                 <a:solidFill>
-                  <a:srgbClr val="20354A"/>
+                  <a:srgbClr val="1F1F1F"/>
                 </a:solidFill>
                 <a:latin typeface="Arial"/>
                 <a:ea typeface="Arial"/>
@@ -2107,21 +2109,21 @@
             <a:avLst/>
           </a:prstGeom>
           <a:solidFill>
-            <a:srgbClr val="008C95"/>
-          </a:solidFill>
-          <a:ln>
-            <a:noFill/>
-          </a:ln>
-        </p:spPr>
-        <p:txBody>
-          <a:bodyPr lIns="0" tIns="0" rIns="0" bIns="0">
-            <a:noAutofit/>
-          </a:bodyPr>
-          <a:lstStyle/>
-          <a:p>
-            <a:endParaRPr lang="en-US" sz="1800">
-              <a:solidFill>
-                <a:srgbClr val="20354A"/>
+            <a:srgbClr val="70AD47"/>
+          </a:solidFill>
+          <a:ln>
+            <a:noFill/>
+          </a:ln>
+        </p:spPr>
+        <p:txBody>
+          <a:bodyPr lIns="0" tIns="0" rIns="0" bIns="0">
+            <a:noAutofit/>
+          </a:bodyPr>
+          <a:lstStyle/>
+          <a:p>
+            <a:endParaRPr lang="en-US" sz="1800">
+              <a:solidFill>
+                <a:srgbClr val="1F1F1F"/>
               </a:solidFill>
               <a:latin typeface="Arial"/>
               <a:ea typeface="Arial"/>
@@ -2158,7 +2160,7 @@
           <a:p>
             <a:endParaRPr lang="en-US" sz="1800">
               <a:solidFill>
-                <a:srgbClr val="20354A"/>
+                <a:srgbClr val="1F1F1F"/>
               </a:solidFill>
               <a:latin typeface="Arial"/>
               <a:ea typeface="Arial"/>
@@ -2195,7 +2197,7 @@
           <a:p>
             <a:endParaRPr lang="en-US" sz="1800">
               <a:solidFill>
-                <a:srgbClr val="20354A"/>
+                <a:srgbClr val="1F1F1F"/>
               </a:solidFill>
               <a:latin typeface="Arial"/>
               <a:ea typeface="Arial"/>
@@ -2231,7 +2233,7 @@
             <a:r>
               <a:rPr lang="en-US" sz="1700">
                 <a:solidFill>
-                  <a:srgbClr val="20354A"/>
+                  <a:srgbClr val="1F1F1F"/>
                 </a:solidFill>
                 <a:latin typeface="Arial"/>
                 <a:ea typeface="Arial"/>
@@ -2256,21 +2258,21 @@
             <a:avLst/>
           </a:prstGeom>
           <a:solidFill>
-            <a:srgbClr val="008C95"/>
-          </a:solidFill>
-          <a:ln>
-            <a:noFill/>
-          </a:ln>
-        </p:spPr>
-        <p:txBody>
-          <a:bodyPr lIns="0" tIns="0" rIns="0" bIns="0">
-            <a:noAutofit/>
-          </a:bodyPr>
-          <a:lstStyle/>
-          <a:p>
-            <a:endParaRPr lang="en-US" sz="1800">
-              <a:solidFill>
-                <a:srgbClr val="20354A"/>
+            <a:srgbClr val="70AD47"/>
+          </a:solidFill>
+          <a:ln>
+            <a:noFill/>
+          </a:ln>
+        </p:spPr>
+        <p:txBody>
+          <a:bodyPr lIns="0" tIns="0" rIns="0" bIns="0">
+            <a:noAutofit/>
+          </a:bodyPr>
+          <a:lstStyle/>
+          <a:p>
+            <a:endParaRPr lang="en-US" sz="1800">
+              <a:solidFill>
+                <a:srgbClr val="1F1F1F"/>
               </a:solidFill>
               <a:latin typeface="Arial"/>
               <a:ea typeface="Arial"/>
@@ -2307,7 +2309,7 @@
           <a:p>
             <a:endParaRPr lang="en-US" sz="1800">
               <a:solidFill>
-                <a:srgbClr val="20354A"/>
+                <a:srgbClr val="1F1F1F"/>
               </a:solidFill>
               <a:latin typeface="Arial"/>
               <a:ea typeface="Arial"/>
@@ -2344,7 +2346,7 @@
           <a:p>
             <a:endParaRPr lang="en-US" sz="1800">
               <a:solidFill>
-                <a:srgbClr val="20354A"/>
+                <a:srgbClr val="1F1F1F"/>
               </a:solidFill>
               <a:latin typeface="Arial"/>
               <a:ea typeface="Arial"/>
@@ -2380,7 +2382,7 @@
             <a:r>
               <a:rPr lang="en-US" sz="1700">
                 <a:solidFill>
-                  <a:srgbClr val="20354A"/>
+                  <a:srgbClr val="1F1F1F"/>
                 </a:solidFill>
                 <a:latin typeface="Arial"/>
                 <a:ea typeface="Arial"/>
@@ -2405,21 +2407,21 @@
             <a:avLst/>
           </a:prstGeom>
           <a:solidFill>
-            <a:srgbClr val="008C95"/>
-          </a:solidFill>
-          <a:ln>
-            <a:noFill/>
-          </a:ln>
-        </p:spPr>
-        <p:txBody>
-          <a:bodyPr lIns="0" tIns="0" rIns="0" bIns="0">
-            <a:noAutofit/>
-          </a:bodyPr>
-          <a:lstStyle/>
-          <a:p>
-            <a:endParaRPr lang="en-US" sz="1800">
-              <a:solidFill>
-                <a:srgbClr val="20354A"/>
+            <a:srgbClr val="70AD47"/>
+          </a:solidFill>
+          <a:ln>
+            <a:noFill/>
+          </a:ln>
+        </p:spPr>
+        <p:txBody>
+          <a:bodyPr lIns="0" tIns="0" rIns="0" bIns="0">
+            <a:noAutofit/>
+          </a:bodyPr>
+          <a:lstStyle/>
+          <a:p>
+            <a:endParaRPr lang="en-US" sz="1800">
+              <a:solidFill>
+                <a:srgbClr val="1F1F1F"/>
               </a:solidFill>
               <a:latin typeface="Arial"/>
               <a:ea typeface="Arial"/>
@@ -2456,7 +2458,7 @@
           <a:p>
             <a:endParaRPr lang="en-US" sz="1800">
               <a:solidFill>
-                <a:srgbClr val="20354A"/>
+                <a:srgbClr val="1F1F1F"/>
               </a:solidFill>
               <a:latin typeface="Arial"/>
               <a:ea typeface="Arial"/>
@@ -2493,7 +2495,7 @@
           <a:p>
             <a:endParaRPr lang="en-US" sz="1800">
               <a:solidFill>
-                <a:srgbClr val="20354A"/>
+                <a:srgbClr val="1F1F1F"/>
               </a:solidFill>
               <a:latin typeface="Arial"/>
               <a:ea typeface="Arial"/>
@@ -2529,7 +2531,7 @@
             <a:r>
               <a:rPr lang="en-US" sz="1700">
                 <a:solidFill>
-                  <a:srgbClr val="20354A"/>
+                  <a:srgbClr val="1F1F1F"/>
                 </a:solidFill>
                 <a:latin typeface="Arial"/>
                 <a:ea typeface="Arial"/>
@@ -2554,21 +2556,21 @@
             <a:avLst/>
           </a:prstGeom>
           <a:solidFill>
-            <a:srgbClr val="008C95"/>
-          </a:solidFill>
-          <a:ln>
-            <a:noFill/>
-          </a:ln>
-        </p:spPr>
-        <p:txBody>
-          <a:bodyPr lIns="0" tIns="0" rIns="0" bIns="0">
-            <a:noAutofit/>
-          </a:bodyPr>
-          <a:lstStyle/>
-          <a:p>
-            <a:endParaRPr lang="en-US" sz="1800">
-              <a:solidFill>
-                <a:srgbClr val="20354A"/>
+            <a:srgbClr val="70AD47"/>
+          </a:solidFill>
+          <a:ln>
+            <a:noFill/>
+          </a:ln>
+        </p:spPr>
+        <p:txBody>
+          <a:bodyPr lIns="0" tIns="0" rIns="0" bIns="0">
+            <a:noAutofit/>
+          </a:bodyPr>
+          <a:lstStyle/>
+          <a:p>
+            <a:endParaRPr lang="en-US" sz="1800">
+              <a:solidFill>
+                <a:srgbClr val="1F1F1F"/>
               </a:solidFill>
               <a:latin typeface="Arial"/>
               <a:ea typeface="Arial"/>
@@ -2605,7 +2607,7 @@
           <a:p>
             <a:endParaRPr lang="en-US" sz="1800">
               <a:solidFill>
-                <a:srgbClr val="20354A"/>
+                <a:srgbClr val="1F1F1F"/>
               </a:solidFill>
               <a:latin typeface="Arial"/>
               <a:ea typeface="Arial"/>
@@ -2642,7 +2644,7 @@
           <a:p>
             <a:endParaRPr lang="en-US" sz="1800">
               <a:solidFill>
-                <a:srgbClr val="20354A"/>
+                <a:srgbClr val="1F1F1F"/>
               </a:solidFill>
               <a:latin typeface="Arial"/>
               <a:ea typeface="Arial"/>
@@ -2678,7 +2680,7 @@
             <a:r>
               <a:rPr lang="en-US" sz="1700">
                 <a:solidFill>
-                  <a:srgbClr val="20354A"/>
+                  <a:srgbClr val="1F1F1F"/>
                 </a:solidFill>
                 <a:latin typeface="Arial"/>
                 <a:ea typeface="Arial"/>
@@ -2703,21 +2705,21 @@
             <a:avLst/>
           </a:prstGeom>
           <a:solidFill>
-            <a:srgbClr val="008C95"/>
-          </a:solidFill>
-          <a:ln>
-            <a:noFill/>
-          </a:ln>
-        </p:spPr>
-        <p:txBody>
-          <a:bodyPr lIns="0" tIns="0" rIns="0" bIns="0">
-            <a:noAutofit/>
-          </a:bodyPr>
-          <a:lstStyle/>
-          <a:p>
-            <a:endParaRPr lang="en-US" sz="1800">
-              <a:solidFill>
-                <a:srgbClr val="20354A"/>
+            <a:srgbClr val="70AD47"/>
+          </a:solidFill>
+          <a:ln>
+            <a:noFill/>
+          </a:ln>
+        </p:spPr>
+        <p:txBody>
+          <a:bodyPr lIns="0" tIns="0" rIns="0" bIns="0">
+            <a:noAutofit/>
+          </a:bodyPr>
+          <a:lstStyle/>
+          <a:p>
+            <a:endParaRPr lang="en-US" sz="1800">
+              <a:solidFill>
+                <a:srgbClr val="1F1F1F"/>
               </a:solidFill>
               <a:latin typeface="Arial"/>
               <a:ea typeface="Arial"/>
@@ -2754,7 +2756,7 @@
           <a:p>
             <a:endParaRPr lang="en-US" sz="1800">
               <a:solidFill>
-                <a:srgbClr val="20354A"/>
+                <a:srgbClr val="1F1F1F"/>
               </a:solidFill>
               <a:latin typeface="Arial"/>
               <a:ea typeface="Arial"/>
@@ -2791,7 +2793,7 @@
           <a:p>
             <a:endParaRPr lang="en-US" sz="1800">
               <a:solidFill>
-                <a:srgbClr val="20354A"/>
+                <a:srgbClr val="1F1F1F"/>
               </a:solidFill>
               <a:latin typeface="Arial"/>
               <a:ea typeface="Arial"/>
@@ -2827,7 +2829,7 @@
             <a:r>
               <a:rPr lang="en-US" sz="1700">
                 <a:solidFill>
-                  <a:srgbClr val="20354A"/>
+                  <a:srgbClr val="1F1F1F"/>
                 </a:solidFill>
                 <a:latin typeface="Arial"/>
                 <a:ea typeface="Arial"/>
@@ -2854,21 +2856,21 @@
             </a:avLst>
           </a:prstGeom>
           <a:solidFill>
-            <a:srgbClr val="FCF4E8"/>
-          </a:solidFill>
-          <a:ln>
-            <a:noFill/>
-          </a:ln>
-        </p:spPr>
-        <p:txBody>
-          <a:bodyPr lIns="0" tIns="0" rIns="0" bIns="0">
-            <a:noAutofit/>
-          </a:bodyPr>
-          <a:lstStyle/>
-          <a:p>
-            <a:endParaRPr lang="en-US" sz="1800">
-              <a:solidFill>
-                <a:srgbClr val="20354A"/>
+            <a:srgbClr val="FFF3EF"/>
+          </a:solidFill>
+          <a:ln>
+            <a:noFill/>
+          </a:ln>
+        </p:spPr>
+        <p:txBody>
+          <a:bodyPr lIns="0" tIns="0" rIns="0" bIns="0">
+            <a:noAutofit/>
+          </a:bodyPr>
+          <a:lstStyle/>
+          <a:p>
+            <a:endParaRPr lang="en-US" sz="1800">
+              <a:solidFill>
+                <a:srgbClr val="1F1F1F"/>
               </a:solidFill>
               <a:latin typeface="Arial"/>
               <a:ea typeface="Arial"/>
@@ -2905,7 +2907,7 @@
             <a:r>
               <a:rPr lang="en-US" sz="2100" b="1">
                 <a:solidFill>
-                  <a:srgbClr val="183B56"/>
+                  <a:srgbClr val="333333"/>
                 </a:solidFill>
                 <a:latin typeface="Arial"/>
                 <a:ea typeface="Arial"/>
@@ -2944,7 +2946,7 @@
             <a:r>
               <a:rPr lang="en-US" sz="1400" b="1">
                 <a:solidFill>
-                  <a:srgbClr val="008C95"/>
+                  <a:srgbClr val="70AD47"/>
                 </a:solidFill>
                 <a:latin typeface="Arial"/>
                 <a:ea typeface="Arial"/>
@@ -2969,21 +2971,21 @@
             <a:avLst/>
           </a:prstGeom>
           <a:solidFill>
-            <a:srgbClr val="BDCBD4"/>
-          </a:solidFill>
-          <a:ln>
-            <a:noFill/>
-          </a:ln>
-        </p:spPr>
-        <p:txBody>
-          <a:bodyPr lIns="0" tIns="0" rIns="0" bIns="0">
-            <a:noAutofit/>
-          </a:bodyPr>
-          <a:lstStyle/>
-          <a:p>
-            <a:endParaRPr lang="en-US" sz="1800">
-              <a:solidFill>
-                <a:srgbClr val="20354A"/>
+            <a:srgbClr val="D1D1D1"/>
+          </a:solidFill>
+          <a:ln>
+            <a:noFill/>
+          </a:ln>
+        </p:spPr>
+        <p:txBody>
+          <a:bodyPr lIns="0" tIns="0" rIns="0" bIns="0">
+            <a:noAutofit/>
+          </a:bodyPr>
+          <a:lstStyle/>
+          <a:p>
+            <a:endParaRPr lang="en-US" sz="1800">
+              <a:solidFill>
+                <a:srgbClr val="1F1F1F"/>
               </a:solidFill>
               <a:latin typeface="Arial"/>
               <a:ea typeface="Arial"/>
@@ -3006,21 +3008,21 @@
             <a:avLst/>
           </a:prstGeom>
           <a:solidFill>
-            <a:srgbClr val="008C95"/>
-          </a:solidFill>
-          <a:ln>
-            <a:noFill/>
-          </a:ln>
-        </p:spPr>
-        <p:txBody>
-          <a:bodyPr lIns="0" tIns="0" rIns="0" bIns="0">
-            <a:noAutofit/>
-          </a:bodyPr>
-          <a:lstStyle/>
-          <a:p>
-            <a:endParaRPr lang="en-US" sz="1800">
-              <a:solidFill>
-                <a:srgbClr val="20354A"/>
+            <a:srgbClr val="70AD47"/>
+          </a:solidFill>
+          <a:ln>
+            <a:noFill/>
+          </a:ln>
+        </p:spPr>
+        <p:txBody>
+          <a:bodyPr lIns="0" tIns="0" rIns="0" bIns="0">
+            <a:noAutofit/>
+          </a:bodyPr>
+          <a:lstStyle/>
+          <a:p>
+            <a:endParaRPr lang="en-US" sz="1800">
+              <a:solidFill>
+                <a:srgbClr val="1F1F1F"/>
               </a:solidFill>
               <a:latin typeface="Arial"/>
               <a:ea typeface="Arial"/>
@@ -3057,7 +3059,7 @@
           <a:p>
             <a:endParaRPr lang="en-US" sz="1800">
               <a:solidFill>
-                <a:srgbClr val="20354A"/>
+                <a:srgbClr val="1F1F1F"/>
               </a:solidFill>
               <a:latin typeface="Arial"/>
               <a:ea typeface="Arial"/>
@@ -3094,7 +3096,7 @@
           <a:p>
             <a:endParaRPr lang="en-US" sz="1800">
               <a:solidFill>
-                <a:srgbClr val="20354A"/>
+                <a:srgbClr val="1F1F1F"/>
               </a:solidFill>
               <a:latin typeface="Arial"/>
               <a:ea typeface="Arial"/>
@@ -3130,7 +3132,7 @@
             <a:r>
               <a:rPr lang="en-US" sz="1700">
                 <a:solidFill>
-                  <a:srgbClr val="20354A"/>
+                  <a:srgbClr val="1F1F1F"/>
                 </a:solidFill>
                 <a:latin typeface="Arial"/>
                 <a:ea typeface="Arial"/>
@@ -3155,21 +3157,21 @@
             <a:avLst/>
           </a:prstGeom>
           <a:solidFill>
-            <a:srgbClr val="008C95"/>
-          </a:solidFill>
-          <a:ln>
-            <a:noFill/>
-          </a:ln>
-        </p:spPr>
-        <p:txBody>
-          <a:bodyPr lIns="0" tIns="0" rIns="0" bIns="0">
-            <a:noAutofit/>
-          </a:bodyPr>
-          <a:lstStyle/>
-          <a:p>
-            <a:endParaRPr lang="en-US" sz="1800">
-              <a:solidFill>
-                <a:srgbClr val="20354A"/>
+            <a:srgbClr val="70AD47"/>
+          </a:solidFill>
+          <a:ln>
+            <a:noFill/>
+          </a:ln>
+        </p:spPr>
+        <p:txBody>
+          <a:bodyPr lIns="0" tIns="0" rIns="0" bIns="0">
+            <a:noAutofit/>
+          </a:bodyPr>
+          <a:lstStyle/>
+          <a:p>
+            <a:endParaRPr lang="en-US" sz="1800">
+              <a:solidFill>
+                <a:srgbClr val="1F1F1F"/>
               </a:solidFill>
               <a:latin typeface="Arial"/>
               <a:ea typeface="Arial"/>
@@ -3206,7 +3208,7 @@
           <a:p>
             <a:endParaRPr lang="en-US" sz="1800">
               <a:solidFill>
-                <a:srgbClr val="20354A"/>
+                <a:srgbClr val="1F1F1F"/>
               </a:solidFill>
               <a:latin typeface="Arial"/>
               <a:ea typeface="Arial"/>
@@ -3243,7 +3245,7 @@
           <a:p>
             <a:endParaRPr lang="en-US" sz="1800">
               <a:solidFill>
-                <a:srgbClr val="20354A"/>
+                <a:srgbClr val="1F1F1F"/>
               </a:solidFill>
               <a:latin typeface="Arial"/>
               <a:ea typeface="Arial"/>
@@ -3279,7 +3281,7 @@
             <a:r>
               <a:rPr lang="en-US" sz="1700">
                 <a:solidFill>
-                  <a:srgbClr val="20354A"/>
+                  <a:srgbClr val="1F1F1F"/>
                 </a:solidFill>
                 <a:latin typeface="Arial"/>
                 <a:ea typeface="Arial"/>
@@ -3304,21 +3306,21 @@
             <a:avLst/>
           </a:prstGeom>
           <a:solidFill>
-            <a:srgbClr val="008C95"/>
-          </a:solidFill>
-          <a:ln>
-            <a:noFill/>
-          </a:ln>
-        </p:spPr>
-        <p:txBody>
-          <a:bodyPr lIns="0" tIns="0" rIns="0" bIns="0">
-            <a:noAutofit/>
-          </a:bodyPr>
-          <a:lstStyle/>
-          <a:p>
-            <a:endParaRPr lang="en-US" sz="1800">
-              <a:solidFill>
-                <a:srgbClr val="20354A"/>
+            <a:srgbClr val="70AD47"/>
+          </a:solidFill>
+          <a:ln>
+            <a:noFill/>
+          </a:ln>
+        </p:spPr>
+        <p:txBody>
+          <a:bodyPr lIns="0" tIns="0" rIns="0" bIns="0">
+            <a:noAutofit/>
+          </a:bodyPr>
+          <a:lstStyle/>
+          <a:p>
+            <a:endParaRPr lang="en-US" sz="1800">
+              <a:solidFill>
+                <a:srgbClr val="1F1F1F"/>
               </a:solidFill>
               <a:latin typeface="Arial"/>
               <a:ea typeface="Arial"/>
@@ -3355,7 +3357,7 @@
           <a:p>
             <a:endParaRPr lang="en-US" sz="1800">
               <a:solidFill>
-                <a:srgbClr val="20354A"/>
+                <a:srgbClr val="1F1F1F"/>
               </a:solidFill>
               <a:latin typeface="Arial"/>
               <a:ea typeface="Arial"/>
@@ -3392,7 +3394,7 @@
           <a:p>
             <a:endParaRPr lang="en-US" sz="1800">
               <a:solidFill>
-                <a:srgbClr val="20354A"/>
+                <a:srgbClr val="1F1F1F"/>
               </a:solidFill>
               <a:latin typeface="Arial"/>
               <a:ea typeface="Arial"/>
@@ -3428,7 +3430,7 @@
             <a:r>
               <a:rPr lang="en-US" sz="1700">
                 <a:solidFill>
-                  <a:srgbClr val="20354A"/>
+                  <a:srgbClr val="1F1F1F"/>
                 </a:solidFill>
                 <a:latin typeface="Arial"/>
                 <a:ea typeface="Arial"/>
@@ -3453,21 +3455,21 @@
             <a:avLst/>
           </a:prstGeom>
           <a:solidFill>
-            <a:srgbClr val="008C95"/>
-          </a:solidFill>
-          <a:ln>
-            <a:noFill/>
-          </a:ln>
-        </p:spPr>
-        <p:txBody>
-          <a:bodyPr lIns="0" tIns="0" rIns="0" bIns="0">
-            <a:noAutofit/>
-          </a:bodyPr>
-          <a:lstStyle/>
-          <a:p>
-            <a:endParaRPr lang="en-US" sz="1800">
-              <a:solidFill>
-                <a:srgbClr val="20354A"/>
+            <a:srgbClr val="70AD47"/>
+          </a:solidFill>
+          <a:ln>
+            <a:noFill/>
+          </a:ln>
+        </p:spPr>
+        <p:txBody>
+          <a:bodyPr lIns="0" tIns="0" rIns="0" bIns="0">
+            <a:noAutofit/>
+          </a:bodyPr>
+          <a:lstStyle/>
+          <a:p>
+            <a:endParaRPr lang="en-US" sz="1800">
+              <a:solidFill>
+                <a:srgbClr val="1F1F1F"/>
               </a:solidFill>
               <a:latin typeface="Arial"/>
               <a:ea typeface="Arial"/>
@@ -3504,7 +3506,7 @@
           <a:p>
             <a:endParaRPr lang="en-US" sz="1800">
               <a:solidFill>
-                <a:srgbClr val="20354A"/>
+                <a:srgbClr val="1F1F1F"/>
               </a:solidFill>
               <a:latin typeface="Arial"/>
               <a:ea typeface="Arial"/>
@@ -3541,7 +3543,7 @@
           <a:p>
             <a:endParaRPr lang="en-US" sz="1800">
               <a:solidFill>
-                <a:srgbClr val="20354A"/>
+                <a:srgbClr val="1F1F1F"/>
               </a:solidFill>
               <a:latin typeface="Arial"/>
               <a:ea typeface="Arial"/>
@@ -3577,7 +3579,7 @@
             <a:r>
               <a:rPr lang="en-US" sz="1700">
                 <a:solidFill>
-                  <a:srgbClr val="20354A"/>
+                  <a:srgbClr val="1F1F1F"/>
                 </a:solidFill>
                 <a:latin typeface="Arial"/>
                 <a:ea typeface="Arial"/>
@@ -3602,21 +3604,21 @@
             <a:avLst/>
           </a:prstGeom>
           <a:solidFill>
-            <a:srgbClr val="008C95"/>
-          </a:solidFill>
-          <a:ln>
-            <a:noFill/>
-          </a:ln>
-        </p:spPr>
-        <p:txBody>
-          <a:bodyPr lIns="0" tIns="0" rIns="0" bIns="0">
-            <a:noAutofit/>
-          </a:bodyPr>
-          <a:lstStyle/>
-          <a:p>
-            <a:endParaRPr lang="en-US" sz="1800">
-              <a:solidFill>
-                <a:srgbClr val="20354A"/>
+            <a:srgbClr val="70AD47"/>
+          </a:solidFill>
+          <a:ln>
+            <a:noFill/>
+          </a:ln>
+        </p:spPr>
+        <p:txBody>
+          <a:bodyPr lIns="0" tIns="0" rIns="0" bIns="0">
+            <a:noAutofit/>
+          </a:bodyPr>
+          <a:lstStyle/>
+          <a:p>
+            <a:endParaRPr lang="en-US" sz="1800">
+              <a:solidFill>
+                <a:srgbClr val="1F1F1F"/>
               </a:solidFill>
               <a:latin typeface="Arial"/>
               <a:ea typeface="Arial"/>
@@ -3653,7 +3655,7 @@
           <a:p>
             <a:endParaRPr lang="en-US" sz="1800">
               <a:solidFill>
-                <a:srgbClr val="20354A"/>
+                <a:srgbClr val="1F1F1F"/>
               </a:solidFill>
               <a:latin typeface="Arial"/>
               <a:ea typeface="Arial"/>
@@ -3690,7 +3692,7 @@
           <a:p>
             <a:endParaRPr lang="en-US" sz="1800">
               <a:solidFill>
-                <a:srgbClr val="20354A"/>
+                <a:srgbClr val="1F1F1F"/>
               </a:solidFill>
               <a:latin typeface="Arial"/>
               <a:ea typeface="Arial"/>
@@ -3726,7 +3728,7 @@
             <a:r>
               <a:rPr lang="en-US" sz="1700">
                 <a:solidFill>
-                  <a:srgbClr val="20354A"/>
+                  <a:srgbClr val="1F1F1F"/>
                 </a:solidFill>
                 <a:latin typeface="Arial"/>
                 <a:ea typeface="Arial"/>
@@ -3751,21 +3753,21 @@
             <a:avLst/>
           </a:prstGeom>
           <a:solidFill>
-            <a:srgbClr val="008C95"/>
-          </a:solidFill>
-          <a:ln>
-            <a:noFill/>
-          </a:ln>
-        </p:spPr>
-        <p:txBody>
-          <a:bodyPr lIns="0" tIns="0" rIns="0" bIns="0">
-            <a:noAutofit/>
-          </a:bodyPr>
-          <a:lstStyle/>
-          <a:p>
-            <a:endParaRPr lang="en-US" sz="1800">
-              <a:solidFill>
-                <a:srgbClr val="20354A"/>
+            <a:srgbClr val="70AD47"/>
+          </a:solidFill>
+          <a:ln>
+            <a:noFill/>
+          </a:ln>
+        </p:spPr>
+        <p:txBody>
+          <a:bodyPr lIns="0" tIns="0" rIns="0" bIns="0">
+            <a:noAutofit/>
+          </a:bodyPr>
+          <a:lstStyle/>
+          <a:p>
+            <a:endParaRPr lang="en-US" sz="1800">
+              <a:solidFill>
+                <a:srgbClr val="1F1F1F"/>
               </a:solidFill>
               <a:latin typeface="Arial"/>
               <a:ea typeface="Arial"/>
@@ -3802,7 +3804,7 @@
           <a:p>
             <a:endParaRPr lang="en-US" sz="1800">
               <a:solidFill>
-                <a:srgbClr val="20354A"/>
+                <a:srgbClr val="1F1F1F"/>
               </a:solidFill>
               <a:latin typeface="Arial"/>
               <a:ea typeface="Arial"/>
@@ -3839,7 +3841,7 @@
           <a:p>
             <a:endParaRPr lang="en-US" sz="1800">
               <a:solidFill>
-                <a:srgbClr val="20354A"/>
+                <a:srgbClr val="1F1F1F"/>
               </a:solidFill>
               <a:latin typeface="Arial"/>
               <a:ea typeface="Arial"/>
@@ -3875,7 +3877,7 @@
             <a:r>
               <a:rPr lang="en-US" sz="1700">
                 <a:solidFill>
-                  <a:srgbClr val="20354A"/>
+                  <a:srgbClr val="1F1F1F"/>
                 </a:solidFill>
                 <a:latin typeface="Arial"/>
                 <a:ea typeface="Arial"/>
@@ -3894,7 +3896,7 @@
           <p:nvPr/>
         </p:nvPicPr>
         <p:blipFill>
-          <a:blip xmlns:r="http://schemas.openxmlformats.org/officeDocument/2006/relationships" r:embed="R2e1b491f04ca4d45"/>
+          <a:blip xmlns:r="http://schemas.openxmlformats.org/officeDocument/2006/relationships" r:embed="R395230128ad04eab"/>
           <a:srcRect l="21371" t="23684" r="21291" b="20972"/>
           <a:stretch>
             <a:fillRect/>
@@ -3919,7 +3921,7 @@
           <p:nvPr/>
         </p:nvPicPr>
         <p:blipFill>
-          <a:blip xmlns:r="http://schemas.openxmlformats.org/officeDocument/2006/relationships" r:embed="Rc469a79aa2dc4e3e"/>
+          <a:blip xmlns:r="http://schemas.openxmlformats.org/officeDocument/2006/relationships" r:embed="Ra2656da78e874075"/>
           <a:srcRect l="21371" t="23684" r="21291" b="20972"/>
           <a:stretch>
             <a:fillRect/>
@@ -3950,21 +3952,21 @@
             <a:avLst/>
           </a:prstGeom>
           <a:solidFill>
-            <a:srgbClr val="DF973E"/>
-          </a:solidFill>
-          <a:ln>
-            <a:noFill/>
-          </a:ln>
-        </p:spPr>
-        <p:txBody>
-          <a:bodyPr lIns="0" tIns="0" rIns="0" bIns="0">
-            <a:noAutofit/>
-          </a:bodyPr>
-          <a:lstStyle/>
-          <a:p>
-            <a:endParaRPr lang="en-US" sz="1800">
-              <a:solidFill>
-                <a:srgbClr val="20354A"/>
+            <a:srgbClr val="ED7D31"/>
+          </a:solidFill>
+          <a:ln>
+            <a:noFill/>
+          </a:ln>
+        </p:spPr>
+        <p:txBody>
+          <a:bodyPr lIns="0" tIns="0" rIns="0" bIns="0">
+            <a:noAutofit/>
+          </a:bodyPr>
+          <a:lstStyle/>
+          <a:p>
+            <a:endParaRPr lang="en-US" sz="1800">
+              <a:solidFill>
+                <a:srgbClr val="1F1F1F"/>
               </a:solidFill>
               <a:latin typeface="Arial"/>
               <a:ea typeface="Arial"/>
@@ -3981,7 +3983,7 @@
           <p:nvPr/>
         </p:nvPicPr>
         <p:blipFill>
-          <a:blip xmlns:r="http://schemas.openxmlformats.org/officeDocument/2006/relationships" r:embed="Rc7c7ca0e50a74076"/>
+          <a:blip xmlns:r="http://schemas.openxmlformats.org/officeDocument/2006/relationships" r:embed="R8c69ea75327a44c4"/>
           <a:srcRect l="21371" t="23684" r="21291" b="20972"/>
           <a:stretch>
             <a:fillRect/>
@@ -4018,7 +4020,7 @@
           </a:solidFill>
           <a:ln w="31750">
             <a:solidFill>
-              <a:srgbClr val="183B56"/>
+              <a:srgbClr val="333333"/>
             </a:solidFill>
           </a:ln>
         </p:spPr>
@@ -4030,7 +4032,7 @@
           <a:p>
             <a:endParaRPr lang="en-US" sz="1800">
               <a:solidFill>
-                <a:srgbClr val="20354A"/>
+                <a:srgbClr val="1F1F1F"/>
               </a:solidFill>
               <a:latin typeface="Arial"/>
               <a:ea typeface="Arial"/>
@@ -4053,21 +4055,21 @@
             <a:avLst/>
           </a:prstGeom>
           <a:solidFill>
-            <a:srgbClr val="183B56"/>
-          </a:solidFill>
-          <a:ln>
-            <a:noFill/>
-          </a:ln>
-        </p:spPr>
-        <p:txBody>
-          <a:bodyPr lIns="0" tIns="0" rIns="0" bIns="0">
-            <a:noAutofit/>
-          </a:bodyPr>
-          <a:lstStyle/>
-          <a:p>
-            <a:endParaRPr lang="en-US" sz="1800">
-              <a:solidFill>
-                <a:srgbClr val="20354A"/>
+            <a:srgbClr val="333333"/>
+          </a:solidFill>
+          <a:ln>
+            <a:noFill/>
+          </a:ln>
+        </p:spPr>
+        <p:txBody>
+          <a:bodyPr lIns="0" tIns="0" rIns="0" bIns="0">
+            <a:noAutofit/>
+          </a:bodyPr>
+          <a:lstStyle/>
+          <a:p>
+            <a:endParaRPr lang="en-US" sz="1800">
+              <a:solidFill>
+                <a:srgbClr val="1F1F1F"/>
               </a:solidFill>
               <a:latin typeface="Arial"/>
               <a:ea typeface="Arial"/>
@@ -4090,21 +4092,21 @@
             <a:avLst/>
           </a:prstGeom>
           <a:solidFill>
-            <a:srgbClr val="183B56"/>
-          </a:solidFill>
-          <a:ln>
-            <a:noFill/>
-          </a:ln>
-        </p:spPr>
-        <p:txBody>
-          <a:bodyPr lIns="0" tIns="0" rIns="0" bIns="0">
-            <a:noAutofit/>
-          </a:bodyPr>
-          <a:lstStyle/>
-          <a:p>
-            <a:endParaRPr lang="en-US" sz="1800">
-              <a:solidFill>
-                <a:srgbClr val="20354A"/>
+            <a:srgbClr val="333333"/>
+          </a:solidFill>
+          <a:ln>
+            <a:noFill/>
+          </a:ln>
+        </p:spPr>
+        <p:txBody>
+          <a:bodyPr lIns="0" tIns="0" rIns="0" bIns="0">
+            <a:noAutofit/>
+          </a:bodyPr>
+          <a:lstStyle/>
+          <a:p>
+            <a:endParaRPr lang="en-US" sz="1800">
+              <a:solidFill>
+                <a:srgbClr val="1F1F1F"/>
               </a:solidFill>
               <a:latin typeface="Arial"/>
               <a:ea typeface="Arial"/>
@@ -4121,7 +4123,7 @@
           <p:nvPr/>
         </p:nvPicPr>
         <p:blipFill>
-          <a:blip xmlns:r="http://schemas.openxmlformats.org/officeDocument/2006/relationships" r:embed="Rc173b3d7698c4342"/>
+          <a:blip xmlns:r="http://schemas.openxmlformats.org/officeDocument/2006/relationships" r:embed="R74b18ed20f584cd6"/>
           <a:srcRect l="16746" t="16427" r="16746" b="11961"/>
           <a:stretch>
             <a:fillRect/>
@@ -4156,7 +4158,7 @@
           </a:prstGeom>
           <a:ln w="25400">
             <a:solidFill>
-              <a:srgbClr val="183B56"/>
+              <a:srgbClr val="333333"/>
             </a:solidFill>
             <a:headEnd type="triangle"/>
             <a:tailEnd type="triangle"/>
@@ -4172,7 +4174,7 @@
           <p:nvPr/>
         </p:nvPicPr>
         <p:blipFill>
-          <a:blip xmlns:r="http://schemas.openxmlformats.org/officeDocument/2006/relationships" r:embed="Ra64f2a7bc3424224"/>
+          <a:blip xmlns:r="http://schemas.openxmlformats.org/officeDocument/2006/relationships" r:embed="R3b16c1d1cb164279"/>
           <a:srcRect l="21371" t="23684" r="21291" b="20972"/>
           <a:stretch>
             <a:fillRect/>
@@ -4197,7 +4199,7 @@
           <p:nvPr/>
         </p:nvPicPr>
         <p:blipFill>
-          <a:blip xmlns:r="http://schemas.openxmlformats.org/officeDocument/2006/relationships" r:embed="R2525133ad447425c"/>
+          <a:blip xmlns:r="http://schemas.openxmlformats.org/officeDocument/2006/relationships" r:embed="Rf785973a27744205"/>
           <a:srcRect l="21371" t="23684" r="21291" b="20972"/>
           <a:stretch>
             <a:fillRect/>
@@ -4228,21 +4230,21 @@
             <a:avLst/>
           </a:prstGeom>
           <a:solidFill>
-            <a:srgbClr val="DF973E"/>
-          </a:solidFill>
-          <a:ln>
-            <a:noFill/>
-          </a:ln>
-        </p:spPr>
-        <p:txBody>
-          <a:bodyPr lIns="0" tIns="0" rIns="0" bIns="0">
-            <a:noAutofit/>
-          </a:bodyPr>
-          <a:lstStyle/>
-          <a:p>
-            <a:endParaRPr lang="en-US" sz="1800">
-              <a:solidFill>
-                <a:srgbClr val="20354A"/>
+            <a:srgbClr val="ED7D31"/>
+          </a:solidFill>
+          <a:ln>
+            <a:noFill/>
+          </a:ln>
+        </p:spPr>
+        <p:txBody>
+          <a:bodyPr lIns="0" tIns="0" rIns="0" bIns="0">
+            <a:noAutofit/>
+          </a:bodyPr>
+          <a:lstStyle/>
+          <a:p>
+            <a:endParaRPr lang="en-US" sz="1800">
+              <a:solidFill>
+                <a:srgbClr val="1F1F1F"/>
               </a:solidFill>
               <a:latin typeface="Arial"/>
               <a:ea typeface="Arial"/>
@@ -4259,7 +4261,7 @@
           <p:nvPr/>
         </p:nvPicPr>
         <p:blipFill>
-          <a:blip xmlns:r="http://schemas.openxmlformats.org/officeDocument/2006/relationships" r:embed="Ra3aaea55b5a64e1b"/>
+          <a:blip xmlns:r="http://schemas.openxmlformats.org/officeDocument/2006/relationships" r:embed="Ra20150b21a034340"/>
           <a:srcRect l="13476" t="12679" r="12200" b="13237"/>
           <a:stretch>
             <a:fillRect/>
@@ -4284,7 +4286,7 @@
           <p:nvPr/>
         </p:nvPicPr>
         <p:blipFill>
-          <a:blip xmlns:r="http://schemas.openxmlformats.org/officeDocument/2006/relationships" r:embed="Rd6291934e8654d4c"/>
+          <a:blip xmlns:r="http://schemas.openxmlformats.org/officeDocument/2006/relationships" r:embed="Rf8b2932b2f324a04"/>
           <a:srcRect l="16746" t="16427" r="16746" b="11961"/>
           <a:stretch>
             <a:fillRect/>
@@ -4317,21 +4319,21 @@
             </a:avLst>
           </a:prstGeom>
           <a:solidFill>
-            <a:srgbClr val="EAF4F3"/>
-          </a:solidFill>
-          <a:ln>
-            <a:noFill/>
-          </a:ln>
-        </p:spPr>
-        <p:txBody>
-          <a:bodyPr lIns="0" tIns="0" rIns="0" bIns="0">
-            <a:noAutofit/>
-          </a:bodyPr>
-          <a:lstStyle/>
-          <a:p>
-            <a:endParaRPr lang="en-US" sz="1800">
-              <a:solidFill>
-                <a:srgbClr val="20354A"/>
+            <a:srgbClr val="F1F7EC"/>
+          </a:solidFill>
+          <a:ln>
+            <a:noFill/>
+          </a:ln>
+        </p:spPr>
+        <p:txBody>
+          <a:bodyPr lIns="0" tIns="0" rIns="0" bIns="0">
+            <a:noAutofit/>
+          </a:bodyPr>
+          <a:lstStyle/>
+          <a:p>
+            <a:endParaRPr lang="en-US" sz="1800">
+              <a:solidFill>
+                <a:srgbClr val="1F1F1F"/>
               </a:solidFill>
               <a:latin typeface="Arial"/>
               <a:ea typeface="Arial"/>
@@ -4367,7 +4369,7 @@
             <a:pPr algn="l">
               <a:defRPr sz="1800" b="0">
                 <a:solidFill>
-                  <a:srgbClr val="183B56"/>
+                  <a:srgbClr val="333333"/>
                 </a:solidFill>
                 <a:latin typeface="Arial"/>
                 <a:ea typeface="Arial"/>
@@ -4376,7 +4378,7 @@
             <a:r>
               <a:rPr lang="en-US" sz="1800">
                 <a:solidFill>
-                  <a:srgbClr val="183B56"/>
+                  <a:srgbClr val="333333"/>
                 </a:solidFill>
                 <a:latin typeface="Arial"/>
               </a:rPr>
@@ -4385,7 +4387,7 @@
             <a:r>
               <a:rPr lang="en-US" sz="1800">
                 <a:solidFill>
-                  <a:srgbClr val="183B56"/>
+                  <a:srgbClr val="333333"/>
                 </a:solidFill>
                 <a:latin typeface="Arial"/>
               </a:rPr>
@@ -4394,7 +4396,7 @@
             <a:r>
               <a:rPr lang="en-US" sz="1800">
                 <a:solidFill>
-                  <a:srgbClr val="183B56"/>
+                  <a:srgbClr val="333333"/>
                 </a:solidFill>
                 <a:latin typeface="Arial"/>
               </a:rPr>
@@ -4432,7 +4434,7 @@
             <a:r>
               <a:rPr lang="en-US" sz="1000">
                 <a:solidFill>
-                  <a:srgbClr val="607184"/>
+                  <a:srgbClr val="898989"/>
                 </a:solidFill>
                 <a:latin typeface="Arial"/>
                 <a:ea typeface="Arial"/>
@@ -4464,13 +4466,13 @@
         <a:srgbClr val="E7E6E6"/>
       </a:lt2>
       <a:accent1>
-        <a:srgbClr val="183B56"/>
+        <a:srgbClr val="C00000"/>
       </a:accent1>
       <a:accent2>
-        <a:srgbClr val="008C95"/>
+        <a:srgbClr val="70AD47"/>
       </a:accent2>
       <a:accent3>
-        <a:srgbClr val="DF973E"/>
+        <a:srgbClr val="ED7D31"/>
       </a:accent3>
       <a:accent4>
         <a:srgbClr val="FFC000"/>
